--- a/UML/PP files.pptx
+++ b/UML/PP files.pptx
@@ -6,6 +6,9 @@
   </p:sldMasterIdLst>
   <p:sldIdLst>
     <p:sldId id="256" r:id="rId2"/>
+    <p:sldId id="257" r:id="rId3"/>
+    <p:sldId id="259" r:id="rId4"/>
+    <p:sldId id="258" r:id="rId5"/>
   </p:sldIdLst>
   <p:sldSz cx="12192000" cy="6858000"/>
   <p:notesSz cx="6858000" cy="9144000"/>
@@ -104,6 +107,11 @@
       </a:defRPr>
     </a:lvl9pPr>
   </p:defaultTextStyle>
+  <p:extLst>
+    <p:ext uri="{EFAFB233-063F-42B5-8137-9DF3F51BA10A}">
+      <p15:sldGuideLst xmlns:p15="http://schemas.microsoft.com/office/powerpoint/2012/main"/>
+    </p:ext>
+  </p:extLst>
 </p:presentation>
 </file>
 
@@ -256,7 +264,7 @@
           <a:p>
             <a:fld id="{CB284734-4EDD-4C6C-A8F2-9D431D2418B6}" type="datetimeFigureOut">
               <a:rPr lang="he-IL" smtClean="0"/>
-              <a:t>כ"ט/אייר/תשפ"ו</a:t>
+              <a:t>ז'/תמוז/תשפ"ו</a:t>
             </a:fld>
             <a:endParaRPr lang="he-IL"/>
           </a:p>
@@ -456,7 +464,7 @@
           <a:p>
             <a:fld id="{CB284734-4EDD-4C6C-A8F2-9D431D2418B6}" type="datetimeFigureOut">
               <a:rPr lang="he-IL" smtClean="0"/>
-              <a:t>כ"ט/אייר/תשפ"ו</a:t>
+              <a:t>ז'/תמוז/תשפ"ו</a:t>
             </a:fld>
             <a:endParaRPr lang="he-IL"/>
           </a:p>
@@ -666,7 +674,7 @@
           <a:p>
             <a:fld id="{CB284734-4EDD-4C6C-A8F2-9D431D2418B6}" type="datetimeFigureOut">
               <a:rPr lang="he-IL" smtClean="0"/>
-              <a:t>כ"ט/אייר/תשפ"ו</a:t>
+              <a:t>ז'/תמוז/תשפ"ו</a:t>
             </a:fld>
             <a:endParaRPr lang="he-IL"/>
           </a:p>
@@ -866,7 +874,7 @@
           <a:p>
             <a:fld id="{CB284734-4EDD-4C6C-A8F2-9D431D2418B6}" type="datetimeFigureOut">
               <a:rPr lang="he-IL" smtClean="0"/>
-              <a:t>כ"ט/אייר/תשפ"ו</a:t>
+              <a:t>ז'/תמוז/תשפ"ו</a:t>
             </a:fld>
             <a:endParaRPr lang="he-IL"/>
           </a:p>
@@ -1142,7 +1150,7 @@
           <a:p>
             <a:fld id="{CB284734-4EDD-4C6C-A8F2-9D431D2418B6}" type="datetimeFigureOut">
               <a:rPr lang="he-IL" smtClean="0"/>
-              <a:t>כ"ט/אייר/תשפ"ו</a:t>
+              <a:t>ז'/תמוז/תשפ"ו</a:t>
             </a:fld>
             <a:endParaRPr lang="he-IL"/>
           </a:p>
@@ -1410,7 +1418,7 @@
           <a:p>
             <a:fld id="{CB284734-4EDD-4C6C-A8F2-9D431D2418B6}" type="datetimeFigureOut">
               <a:rPr lang="he-IL" smtClean="0"/>
-              <a:t>כ"ט/אייר/תשפ"ו</a:t>
+              <a:t>ז'/תמוז/תשפ"ו</a:t>
             </a:fld>
             <a:endParaRPr lang="he-IL"/>
           </a:p>
@@ -1825,7 +1833,7 @@
           <a:p>
             <a:fld id="{CB284734-4EDD-4C6C-A8F2-9D431D2418B6}" type="datetimeFigureOut">
               <a:rPr lang="he-IL" smtClean="0"/>
-              <a:t>כ"ט/אייר/תשפ"ו</a:t>
+              <a:t>ז'/תמוז/תשפ"ו</a:t>
             </a:fld>
             <a:endParaRPr lang="he-IL"/>
           </a:p>
@@ -1967,7 +1975,7 @@
           <a:p>
             <a:fld id="{CB284734-4EDD-4C6C-A8F2-9D431D2418B6}" type="datetimeFigureOut">
               <a:rPr lang="he-IL" smtClean="0"/>
-              <a:t>כ"ט/אייר/תשפ"ו</a:t>
+              <a:t>ז'/תמוז/תשפ"ו</a:t>
             </a:fld>
             <a:endParaRPr lang="he-IL"/>
           </a:p>
@@ -2080,7 +2088,7 @@
           <a:p>
             <a:fld id="{CB284734-4EDD-4C6C-A8F2-9D431D2418B6}" type="datetimeFigureOut">
               <a:rPr lang="he-IL" smtClean="0"/>
-              <a:t>כ"ט/אייר/תשפ"ו</a:t>
+              <a:t>ז'/תמוז/תשפ"ו</a:t>
             </a:fld>
             <a:endParaRPr lang="he-IL"/>
           </a:p>
@@ -2393,7 +2401,7 @@
           <a:p>
             <a:fld id="{CB284734-4EDD-4C6C-A8F2-9D431D2418B6}" type="datetimeFigureOut">
               <a:rPr lang="he-IL" smtClean="0"/>
-              <a:t>כ"ט/אייר/תשפ"ו</a:t>
+              <a:t>ז'/תמוז/תשפ"ו</a:t>
             </a:fld>
             <a:endParaRPr lang="he-IL"/>
           </a:p>
@@ -2682,7 +2690,7 @@
           <a:p>
             <a:fld id="{CB284734-4EDD-4C6C-A8F2-9D431D2418B6}" type="datetimeFigureOut">
               <a:rPr lang="he-IL" smtClean="0"/>
-              <a:t>כ"ט/אייר/תשפ"ו</a:t>
+              <a:t>ז'/תמוז/תשפ"ו</a:t>
             </a:fld>
             <a:endParaRPr lang="he-IL"/>
           </a:p>
@@ -2925,7 +2933,7 @@
           <a:p>
             <a:fld id="{CB284734-4EDD-4C6C-A8F2-9D431D2418B6}" type="datetimeFigureOut">
               <a:rPr lang="he-IL" smtClean="0"/>
-              <a:t>כ"ט/אייר/תשפ"ו</a:t>
+              <a:t>ז'/תמוז/תשפ"ו</a:t>
             </a:fld>
             <a:endParaRPr lang="he-IL"/>
           </a:p>
@@ -3992,6 +4000,3963 @@
 </p:sld>
 </file>
 
+<file path=ppt/slides/slide2.xml><?xml version="1.0" encoding="utf-8"?>
+<p:sld xmlns:a="http://schemas.openxmlformats.org/drawingml/2006/main" xmlns:r="http://schemas.openxmlformats.org/officeDocument/2006/relationships" xmlns:p="http://schemas.openxmlformats.org/presentationml/2006/main">
+  <p:cSld>
+    <p:spTree>
+      <p:nvGrpSpPr>
+        <p:cNvPr id="1" name="">
+          <a:extLst>
+            <a:ext uri="{FF2B5EF4-FFF2-40B4-BE49-F238E27FC236}">
+              <a16:creationId xmlns:a16="http://schemas.microsoft.com/office/drawing/2014/main" id="{0612F9E5-9FE9-E48C-81D1-D593DEE36301}"/>
+            </a:ext>
+          </a:extLst>
+        </p:cNvPr>
+        <p:cNvGrpSpPr/>
+        <p:nvPr/>
+      </p:nvGrpSpPr>
+      <p:grpSpPr>
+        <a:xfrm>
+          <a:off x="0" y="0"/>
+          <a:ext cx="0" cy="0"/>
+          <a:chOff x="0" y="0"/>
+          <a:chExt cx="0" cy="0"/>
+        </a:xfrm>
+      </p:grpSpPr>
+      <p:graphicFrame>
+        <p:nvGraphicFramePr>
+          <p:cNvPr id="4" name="Table 3">
+            <a:extLst>
+              <a:ext uri="{FF2B5EF4-FFF2-40B4-BE49-F238E27FC236}">
+                <a16:creationId xmlns:a16="http://schemas.microsoft.com/office/drawing/2014/main" id="{2FDDAF5A-8F91-7876-0CE8-806E7328F2A2}"/>
+              </a:ext>
+            </a:extLst>
+          </p:cNvPr>
+          <p:cNvGraphicFramePr>
+            <a:graphicFrameLocks noGrp="1"/>
+          </p:cNvGraphicFramePr>
+          <p:nvPr>
+            <p:extLst>
+              <p:ext uri="{D42A27DB-BD31-4B8C-83A1-F6EECF244321}">
+                <p14:modId xmlns:p14="http://schemas.microsoft.com/office/powerpoint/2010/main" val="2742608159"/>
+              </p:ext>
+            </p:extLst>
+          </p:nvPr>
+        </p:nvGraphicFramePr>
+        <p:xfrm>
+          <a:off x="715991" y="2652317"/>
+          <a:ext cx="10265434" cy="1903705"/>
+        </p:xfrm>
+        <a:graphic>
+          <a:graphicData uri="http://schemas.openxmlformats.org/drawingml/2006/table">
+            <a:tbl>
+              <a:tblPr rtl="1" firstRow="1" bandRow="1">
+                <a:tableStyleId>{5C22544A-7EE6-4342-B048-85BDC9FD1C3A}</a:tableStyleId>
+              </a:tblPr>
+              <a:tblGrid>
+                <a:gridCol w="1538749">
+                  <a:extLst>
+                    <a:ext uri="{9D8B030D-6E8A-4147-A177-3AD203B41FA5}">
+                      <a16:colId xmlns:a16="http://schemas.microsoft.com/office/drawing/2014/main" val="955862198"/>
+                    </a:ext>
+                  </a:extLst>
+                </a:gridCol>
+                <a:gridCol w="1178571">
+                  <a:extLst>
+                    <a:ext uri="{9D8B030D-6E8A-4147-A177-3AD203B41FA5}">
+                      <a16:colId xmlns:a16="http://schemas.microsoft.com/office/drawing/2014/main" val="1687635297"/>
+                    </a:ext>
+                  </a:extLst>
+                </a:gridCol>
+                <a:gridCol w="924020">
+                  <a:extLst>
+                    <a:ext uri="{9D8B030D-6E8A-4147-A177-3AD203B41FA5}">
+                      <a16:colId xmlns:a16="http://schemas.microsoft.com/office/drawing/2014/main" val="2620613503"/>
+                    </a:ext>
+                  </a:extLst>
+                </a:gridCol>
+                <a:gridCol w="1051296">
+                  <a:extLst>
+                    <a:ext uri="{9D8B030D-6E8A-4147-A177-3AD203B41FA5}">
+                      <a16:colId xmlns:a16="http://schemas.microsoft.com/office/drawing/2014/main" val="1760604788"/>
+                    </a:ext>
+                  </a:extLst>
+                </a:gridCol>
+                <a:gridCol w="1051296">
+                  <a:extLst>
+                    <a:ext uri="{9D8B030D-6E8A-4147-A177-3AD203B41FA5}">
+                      <a16:colId xmlns:a16="http://schemas.microsoft.com/office/drawing/2014/main" val="1100616153"/>
+                    </a:ext>
+                  </a:extLst>
+                </a:gridCol>
+                <a:gridCol w="1051295">
+                  <a:extLst>
+                    <a:ext uri="{9D8B030D-6E8A-4147-A177-3AD203B41FA5}">
+                      <a16:colId xmlns:a16="http://schemas.microsoft.com/office/drawing/2014/main" val="1970551147"/>
+                    </a:ext>
+                  </a:extLst>
+                </a:gridCol>
+                <a:gridCol w="1051296">
+                  <a:extLst>
+                    <a:ext uri="{9D8B030D-6E8A-4147-A177-3AD203B41FA5}">
+                      <a16:colId xmlns:a16="http://schemas.microsoft.com/office/drawing/2014/main" val="2554382947"/>
+                    </a:ext>
+                  </a:extLst>
+                </a:gridCol>
+                <a:gridCol w="2418911">
+                  <a:extLst>
+                    <a:ext uri="{9D8B030D-6E8A-4147-A177-3AD203B41FA5}">
+                      <a16:colId xmlns:a16="http://schemas.microsoft.com/office/drawing/2014/main" val="1617877242"/>
+                    </a:ext>
+                  </a:extLst>
+                </a:gridCol>
+              </a:tblGrid>
+              <a:tr h="0">
+                <a:tc>
+                  <a:txBody>
+                    <a:bodyPr/>
+                    <a:lstStyle/>
+                    <a:p>
+                      <a:pPr algn="ctr" rtl="1"/>
+                      <a:r>
+                        <a:rPr lang="en-US" dirty="0"/>
+                        <a:t>8bits CRC8</a:t>
+                      </a:r>
+                      <a:endParaRPr lang="he-IL" dirty="0"/>
+                    </a:p>
+                  </a:txBody>
+                  <a:tcPr>
+                    <a:lnL w="12700" cap="flat" cmpd="sng" algn="ctr">
+                      <a:solidFill>
+                        <a:schemeClr val="tx1"/>
+                      </a:solidFill>
+                      <a:prstDash val="solid"/>
+                      <a:round/>
+                      <a:headEnd type="none" w="med" len="med"/>
+                      <a:tailEnd type="none" w="med" len="med"/>
+                    </a:lnL>
+                    <a:lnR w="12700" cap="flat" cmpd="sng" algn="ctr">
+                      <a:solidFill>
+                        <a:schemeClr val="tx1"/>
+                      </a:solidFill>
+                      <a:prstDash val="solid"/>
+                      <a:round/>
+                      <a:headEnd type="none" w="med" len="med"/>
+                      <a:tailEnd type="none" w="med" len="med"/>
+                    </a:lnR>
+                    <a:lnT w="12700" cap="flat" cmpd="sng" algn="ctr">
+                      <a:solidFill>
+                        <a:schemeClr val="tx1"/>
+                      </a:solidFill>
+                      <a:prstDash val="solid"/>
+                      <a:round/>
+                      <a:headEnd type="none" w="med" len="med"/>
+                      <a:tailEnd type="none" w="med" len="med"/>
+                    </a:lnT>
+                    <a:lnB w="12700" cap="flat" cmpd="sng" algn="ctr">
+                      <a:solidFill>
+                        <a:schemeClr val="tx1"/>
+                      </a:solidFill>
+                      <a:prstDash val="solid"/>
+                      <a:round/>
+                      <a:headEnd type="none" w="med" len="med"/>
+                      <a:tailEnd type="none" w="med" len="med"/>
+                    </a:lnB>
+                    <a:solidFill>
+                      <a:srgbClr val="C00000"/>
+                    </a:solidFill>
+                  </a:tcPr>
+                </a:tc>
+                <a:tc>
+                  <a:txBody>
+                    <a:bodyPr/>
+                    <a:lstStyle/>
+                    <a:p>
+                      <a:pPr marL="0" marR="0" lvl="0" indent="0" algn="ctr" defTabSz="914400" rtl="1" eaLnBrk="1" fontAlgn="auto" latinLnBrk="0" hangingPunct="1">
+                        <a:lnSpc>
+                          <a:spcPct val="100000"/>
+                        </a:lnSpc>
+                        <a:spcBef>
+                          <a:spcPts val="0"/>
+                        </a:spcBef>
+                        <a:spcAft>
+                          <a:spcPts val="0"/>
+                        </a:spcAft>
+                        <a:buClrTx/>
+                        <a:buSzTx/>
+                        <a:buFontTx/>
+                        <a:buNone/>
+                        <a:tabLst/>
+                        <a:defRPr/>
+                      </a:pPr>
+                      <a:r>
+                        <a:rPr lang="en-US" dirty="0"/>
+                        <a:t>Empty</a:t>
+                      </a:r>
+                      <a:endParaRPr lang="he-IL" dirty="0"/>
+                    </a:p>
+                  </a:txBody>
+                  <a:tcPr>
+                    <a:lnL w="12700" cap="flat" cmpd="sng" algn="ctr">
+                      <a:solidFill>
+                        <a:schemeClr val="tx1"/>
+                      </a:solidFill>
+                      <a:prstDash val="solid"/>
+                      <a:round/>
+                      <a:headEnd type="none" w="med" len="med"/>
+                      <a:tailEnd type="none" w="med" len="med"/>
+                    </a:lnL>
+                    <a:lnR w="12700" cap="flat" cmpd="sng" algn="ctr">
+                      <a:solidFill>
+                        <a:schemeClr val="tx1"/>
+                      </a:solidFill>
+                      <a:prstDash val="solid"/>
+                      <a:round/>
+                      <a:headEnd type="none" w="med" len="med"/>
+                      <a:tailEnd type="none" w="med" len="med"/>
+                    </a:lnR>
+                    <a:lnT w="12700" cap="flat" cmpd="sng" algn="ctr">
+                      <a:solidFill>
+                        <a:schemeClr val="tx1"/>
+                      </a:solidFill>
+                      <a:prstDash val="solid"/>
+                      <a:round/>
+                      <a:headEnd type="none" w="med" len="med"/>
+                      <a:tailEnd type="none" w="med" len="med"/>
+                    </a:lnT>
+                    <a:lnB w="12700" cap="flat" cmpd="sng" algn="ctr">
+                      <a:solidFill>
+                        <a:schemeClr val="tx1"/>
+                      </a:solidFill>
+                      <a:prstDash val="solid"/>
+                      <a:round/>
+                      <a:headEnd type="none" w="med" len="med"/>
+                      <a:tailEnd type="none" w="med" len="med"/>
+                    </a:lnB>
+                    <a:lnTlToBr w="12700" cmpd="sng">
+                      <a:noFill/>
+                      <a:prstDash val="solid"/>
+                    </a:lnTlToBr>
+                    <a:lnBlToTr w="12700" cmpd="sng">
+                      <a:noFill/>
+                      <a:prstDash val="solid"/>
+                    </a:lnBlToTr>
+                    <a:solidFill>
+                      <a:schemeClr val="accent2">
+                        <a:lumMod val="75000"/>
+                      </a:schemeClr>
+                    </a:solidFill>
+                  </a:tcPr>
+                </a:tc>
+                <a:tc>
+                  <a:txBody>
+                    <a:bodyPr/>
+                    <a:lstStyle/>
+                    <a:p>
+                      <a:pPr marL="0" marR="0" lvl="0" indent="0" algn="l" defTabSz="914400" rtl="1" eaLnBrk="1" fontAlgn="auto" latinLnBrk="0" hangingPunct="1">
+                        <a:lnSpc>
+                          <a:spcPct val="100000"/>
+                        </a:lnSpc>
+                        <a:spcBef>
+                          <a:spcPts val="0"/>
+                        </a:spcBef>
+                        <a:spcAft>
+                          <a:spcPts val="0"/>
+                        </a:spcAft>
+                        <a:buClrTx/>
+                        <a:buSzTx/>
+                        <a:buFontTx/>
+                        <a:buNone/>
+                        <a:tabLst/>
+                        <a:defRPr/>
+                      </a:pPr>
+                      <a:r>
+                        <a:rPr lang="en-US" dirty="0"/>
+                        <a:t>Device 5 Id</a:t>
+                      </a:r>
+                      <a:endParaRPr lang="he-IL" dirty="0"/>
+                    </a:p>
+                    <a:p>
+                      <a:pPr rtl="1"/>
+                      <a:endParaRPr lang="he-IL" dirty="0"/>
+                    </a:p>
+                  </a:txBody>
+                  <a:tcPr>
+                    <a:lnL w="12700" cap="flat" cmpd="sng" algn="ctr">
+                      <a:solidFill>
+                        <a:schemeClr val="tx1"/>
+                      </a:solidFill>
+                      <a:prstDash val="solid"/>
+                      <a:round/>
+                      <a:headEnd type="none" w="med" len="med"/>
+                      <a:tailEnd type="none" w="med" len="med"/>
+                    </a:lnL>
+                    <a:lnR w="12700" cap="flat" cmpd="sng" algn="ctr">
+                      <a:solidFill>
+                        <a:schemeClr val="tx1"/>
+                      </a:solidFill>
+                      <a:prstDash val="solid"/>
+                      <a:round/>
+                      <a:headEnd type="none" w="med" len="med"/>
+                      <a:tailEnd type="none" w="med" len="med"/>
+                    </a:lnR>
+                    <a:lnT w="12700" cap="flat" cmpd="sng" algn="ctr">
+                      <a:solidFill>
+                        <a:schemeClr val="tx1"/>
+                      </a:solidFill>
+                      <a:prstDash val="solid"/>
+                      <a:round/>
+                      <a:headEnd type="none" w="med" len="med"/>
+                      <a:tailEnd type="none" w="med" len="med"/>
+                    </a:lnT>
+                    <a:lnB w="12700" cap="flat" cmpd="sng" algn="ctr">
+                      <a:solidFill>
+                        <a:schemeClr val="tx1"/>
+                      </a:solidFill>
+                      <a:prstDash val="solid"/>
+                      <a:round/>
+                      <a:headEnd type="none" w="med" len="med"/>
+                      <a:tailEnd type="none" w="med" len="med"/>
+                    </a:lnB>
+                    <a:lnTlToBr w="12700" cmpd="sng">
+                      <a:noFill/>
+                      <a:prstDash val="solid"/>
+                    </a:lnTlToBr>
+                    <a:lnBlToTr w="12700" cmpd="sng">
+                      <a:noFill/>
+                      <a:prstDash val="solid"/>
+                    </a:lnBlToTr>
+                    <a:solidFill>
+                      <a:schemeClr val="accent2">
+                        <a:lumMod val="75000"/>
+                      </a:schemeClr>
+                    </a:solidFill>
+                  </a:tcPr>
+                </a:tc>
+                <a:tc>
+                  <a:txBody>
+                    <a:bodyPr/>
+                    <a:lstStyle/>
+                    <a:p>
+                      <a:pPr marL="0" marR="0" lvl="0" indent="0" algn="l" defTabSz="914400" rtl="1" eaLnBrk="1" fontAlgn="auto" latinLnBrk="0" hangingPunct="1">
+                        <a:lnSpc>
+                          <a:spcPct val="100000"/>
+                        </a:lnSpc>
+                        <a:spcBef>
+                          <a:spcPts val="0"/>
+                        </a:spcBef>
+                        <a:spcAft>
+                          <a:spcPts val="0"/>
+                        </a:spcAft>
+                        <a:buClrTx/>
+                        <a:buSzTx/>
+                        <a:buFontTx/>
+                        <a:buNone/>
+                        <a:tabLst/>
+                        <a:defRPr/>
+                      </a:pPr>
+                      <a:r>
+                        <a:rPr lang="en-US" dirty="0"/>
+                        <a:t>Device 4 Id</a:t>
+                      </a:r>
+                      <a:endParaRPr lang="he-IL" dirty="0"/>
+                    </a:p>
+                    <a:p>
+                      <a:pPr rtl="1"/>
+                      <a:endParaRPr lang="he-IL" dirty="0"/>
+                    </a:p>
+                  </a:txBody>
+                  <a:tcPr>
+                    <a:lnL w="12700" cap="flat" cmpd="sng" algn="ctr">
+                      <a:solidFill>
+                        <a:schemeClr val="tx1"/>
+                      </a:solidFill>
+                      <a:prstDash val="solid"/>
+                      <a:round/>
+                      <a:headEnd type="none" w="med" len="med"/>
+                      <a:tailEnd type="none" w="med" len="med"/>
+                    </a:lnL>
+                    <a:lnR w="12700" cap="flat" cmpd="sng" algn="ctr">
+                      <a:solidFill>
+                        <a:schemeClr val="tx1"/>
+                      </a:solidFill>
+                      <a:prstDash val="solid"/>
+                      <a:round/>
+                      <a:headEnd type="none" w="med" len="med"/>
+                      <a:tailEnd type="none" w="med" len="med"/>
+                    </a:lnR>
+                    <a:lnT w="12700" cap="flat" cmpd="sng" algn="ctr">
+                      <a:solidFill>
+                        <a:schemeClr val="tx1"/>
+                      </a:solidFill>
+                      <a:prstDash val="solid"/>
+                      <a:round/>
+                      <a:headEnd type="none" w="med" len="med"/>
+                      <a:tailEnd type="none" w="med" len="med"/>
+                    </a:lnT>
+                    <a:lnB w="12700" cap="flat" cmpd="sng" algn="ctr">
+                      <a:solidFill>
+                        <a:schemeClr val="tx1"/>
+                      </a:solidFill>
+                      <a:prstDash val="solid"/>
+                      <a:round/>
+                      <a:headEnd type="none" w="med" len="med"/>
+                      <a:tailEnd type="none" w="med" len="med"/>
+                    </a:lnB>
+                    <a:lnTlToBr w="12700" cmpd="sng">
+                      <a:noFill/>
+                      <a:prstDash val="solid"/>
+                    </a:lnTlToBr>
+                    <a:lnBlToTr w="12700" cmpd="sng">
+                      <a:noFill/>
+                      <a:prstDash val="solid"/>
+                    </a:lnBlToTr>
+                    <a:solidFill>
+                      <a:schemeClr val="accent2">
+                        <a:lumMod val="75000"/>
+                      </a:schemeClr>
+                    </a:solidFill>
+                  </a:tcPr>
+                </a:tc>
+                <a:tc>
+                  <a:txBody>
+                    <a:bodyPr/>
+                    <a:lstStyle/>
+                    <a:p>
+                      <a:pPr marL="0" marR="0" lvl="0" indent="0" algn="l" defTabSz="914400" rtl="1" eaLnBrk="1" fontAlgn="auto" latinLnBrk="0" hangingPunct="1">
+                        <a:lnSpc>
+                          <a:spcPct val="100000"/>
+                        </a:lnSpc>
+                        <a:spcBef>
+                          <a:spcPts val="0"/>
+                        </a:spcBef>
+                        <a:spcAft>
+                          <a:spcPts val="0"/>
+                        </a:spcAft>
+                        <a:buClrTx/>
+                        <a:buSzTx/>
+                        <a:buFontTx/>
+                        <a:buNone/>
+                        <a:tabLst/>
+                        <a:defRPr/>
+                      </a:pPr>
+                      <a:r>
+                        <a:rPr lang="en-US" dirty="0"/>
+                        <a:t>Device 3 Id</a:t>
+                      </a:r>
+                      <a:endParaRPr lang="he-IL" dirty="0"/>
+                    </a:p>
+                    <a:p>
+                      <a:pPr rtl="1"/>
+                      <a:endParaRPr lang="he-IL" dirty="0"/>
+                    </a:p>
+                  </a:txBody>
+                  <a:tcPr>
+                    <a:lnL w="12700" cap="flat" cmpd="sng" algn="ctr">
+                      <a:solidFill>
+                        <a:schemeClr val="tx1"/>
+                      </a:solidFill>
+                      <a:prstDash val="solid"/>
+                      <a:round/>
+                      <a:headEnd type="none" w="med" len="med"/>
+                      <a:tailEnd type="none" w="med" len="med"/>
+                    </a:lnL>
+                    <a:lnR w="12700" cap="flat" cmpd="sng" algn="ctr">
+                      <a:solidFill>
+                        <a:schemeClr val="tx1"/>
+                      </a:solidFill>
+                      <a:prstDash val="solid"/>
+                      <a:round/>
+                      <a:headEnd type="none" w="med" len="med"/>
+                      <a:tailEnd type="none" w="med" len="med"/>
+                    </a:lnR>
+                    <a:lnT w="12700" cap="flat" cmpd="sng" algn="ctr">
+                      <a:solidFill>
+                        <a:schemeClr val="tx1"/>
+                      </a:solidFill>
+                      <a:prstDash val="solid"/>
+                      <a:round/>
+                      <a:headEnd type="none" w="med" len="med"/>
+                      <a:tailEnd type="none" w="med" len="med"/>
+                    </a:lnT>
+                    <a:lnB w="12700" cap="flat" cmpd="sng" algn="ctr">
+                      <a:solidFill>
+                        <a:schemeClr val="tx1"/>
+                      </a:solidFill>
+                      <a:prstDash val="solid"/>
+                      <a:round/>
+                      <a:headEnd type="none" w="med" len="med"/>
+                      <a:tailEnd type="none" w="med" len="med"/>
+                    </a:lnB>
+                    <a:lnTlToBr w="12700" cmpd="sng">
+                      <a:noFill/>
+                      <a:prstDash val="solid"/>
+                    </a:lnTlToBr>
+                    <a:lnBlToTr w="12700" cmpd="sng">
+                      <a:noFill/>
+                      <a:prstDash val="solid"/>
+                    </a:lnBlToTr>
+                    <a:solidFill>
+                      <a:schemeClr val="accent2">
+                        <a:lumMod val="75000"/>
+                      </a:schemeClr>
+                    </a:solidFill>
+                  </a:tcPr>
+                </a:tc>
+                <a:tc>
+                  <a:txBody>
+                    <a:bodyPr/>
+                    <a:lstStyle/>
+                    <a:p>
+                      <a:pPr rtl="1"/>
+                      <a:r>
+                        <a:rPr lang="en-US" dirty="0"/>
+                        <a:t>Device 2 Id</a:t>
+                      </a:r>
+                      <a:endParaRPr lang="he-IL" dirty="0"/>
+                    </a:p>
+                  </a:txBody>
+                  <a:tcPr>
+                    <a:lnL w="12700" cap="flat" cmpd="sng" algn="ctr">
+                      <a:solidFill>
+                        <a:schemeClr val="tx1"/>
+                      </a:solidFill>
+                      <a:prstDash val="solid"/>
+                      <a:round/>
+                      <a:headEnd type="none" w="med" len="med"/>
+                      <a:tailEnd type="none" w="med" len="med"/>
+                    </a:lnL>
+                    <a:lnR w="12700" cap="flat" cmpd="sng" algn="ctr">
+                      <a:solidFill>
+                        <a:schemeClr val="tx1"/>
+                      </a:solidFill>
+                      <a:prstDash val="solid"/>
+                      <a:round/>
+                      <a:headEnd type="none" w="med" len="med"/>
+                      <a:tailEnd type="none" w="med" len="med"/>
+                    </a:lnR>
+                    <a:lnT w="12700" cap="flat" cmpd="sng" algn="ctr">
+                      <a:solidFill>
+                        <a:schemeClr val="tx1"/>
+                      </a:solidFill>
+                      <a:prstDash val="solid"/>
+                      <a:round/>
+                      <a:headEnd type="none" w="med" len="med"/>
+                      <a:tailEnd type="none" w="med" len="med"/>
+                    </a:lnT>
+                    <a:lnB w="12700" cap="flat" cmpd="sng" algn="ctr">
+                      <a:solidFill>
+                        <a:schemeClr val="tx1"/>
+                      </a:solidFill>
+                      <a:prstDash val="solid"/>
+                      <a:round/>
+                      <a:headEnd type="none" w="med" len="med"/>
+                      <a:tailEnd type="none" w="med" len="med"/>
+                    </a:lnB>
+                    <a:lnTlToBr w="12700" cmpd="sng">
+                      <a:noFill/>
+                      <a:prstDash val="solid"/>
+                    </a:lnTlToBr>
+                    <a:lnBlToTr w="12700" cmpd="sng">
+                      <a:noFill/>
+                      <a:prstDash val="solid"/>
+                    </a:lnBlToTr>
+                    <a:solidFill>
+                      <a:schemeClr val="accent2">
+                        <a:lumMod val="75000"/>
+                      </a:schemeClr>
+                    </a:solidFill>
+                  </a:tcPr>
+                </a:tc>
+                <a:tc>
+                  <a:txBody>
+                    <a:bodyPr/>
+                    <a:lstStyle/>
+                    <a:p>
+                      <a:pPr rtl="1"/>
+                      <a:r>
+                        <a:rPr lang="en-US" dirty="0"/>
+                        <a:t>Root ID</a:t>
+                      </a:r>
+                      <a:endParaRPr lang="he-IL" dirty="0"/>
+                    </a:p>
+                  </a:txBody>
+                  <a:tcPr>
+                    <a:lnL w="12700" cap="flat" cmpd="sng" algn="ctr">
+                      <a:solidFill>
+                        <a:schemeClr val="tx1"/>
+                      </a:solidFill>
+                      <a:prstDash val="solid"/>
+                      <a:round/>
+                      <a:headEnd type="none" w="med" len="med"/>
+                      <a:tailEnd type="none" w="med" len="med"/>
+                    </a:lnL>
+                    <a:lnR w="12700" cap="flat" cmpd="sng" algn="ctr">
+                      <a:solidFill>
+                        <a:schemeClr val="tx1"/>
+                      </a:solidFill>
+                      <a:prstDash val="solid"/>
+                      <a:round/>
+                      <a:headEnd type="none" w="med" len="med"/>
+                      <a:tailEnd type="none" w="med" len="med"/>
+                    </a:lnR>
+                    <a:lnT w="12700" cap="flat" cmpd="sng" algn="ctr">
+                      <a:solidFill>
+                        <a:schemeClr val="tx1"/>
+                      </a:solidFill>
+                      <a:prstDash val="solid"/>
+                      <a:round/>
+                      <a:headEnd type="none" w="med" len="med"/>
+                      <a:tailEnd type="none" w="med" len="med"/>
+                    </a:lnT>
+                    <a:lnB w="12700" cap="flat" cmpd="sng" algn="ctr">
+                      <a:solidFill>
+                        <a:schemeClr val="tx1"/>
+                      </a:solidFill>
+                      <a:prstDash val="solid"/>
+                      <a:round/>
+                      <a:headEnd type="none" w="med" len="med"/>
+                      <a:tailEnd type="none" w="med" len="med"/>
+                    </a:lnB>
+                    <a:lnTlToBr w="12700" cmpd="sng">
+                      <a:noFill/>
+                      <a:prstDash val="solid"/>
+                    </a:lnTlToBr>
+                    <a:lnBlToTr w="12700" cmpd="sng">
+                      <a:noFill/>
+                      <a:prstDash val="solid"/>
+                    </a:lnBlToTr>
+                    <a:solidFill>
+                      <a:schemeClr val="accent2">
+                        <a:lumMod val="75000"/>
+                      </a:schemeClr>
+                    </a:solidFill>
+                  </a:tcPr>
+                </a:tc>
+                <a:tc>
+                  <a:txBody>
+                    <a:bodyPr/>
+                    <a:lstStyle/>
+                    <a:p>
+                      <a:pPr algn="ctr" rtl="1"/>
+                      <a:r>
+                        <a:rPr lang="en-US" dirty="0"/>
+                        <a:t>TYPE</a:t>
+                      </a:r>
+                      <a:br>
+                        <a:rPr lang="en-US" dirty="0"/>
+                      </a:br>
+                      <a:r>
+                        <a:rPr lang="en-US" dirty="0"/>
+                        <a:t>4bits</a:t>
+                      </a:r>
+                      <a:endParaRPr lang="he-IL" dirty="0"/>
+                    </a:p>
+                  </a:txBody>
+                  <a:tcPr>
+                    <a:lnL w="12700" cap="flat" cmpd="sng" algn="ctr">
+                      <a:solidFill>
+                        <a:schemeClr val="tx1"/>
+                      </a:solidFill>
+                      <a:prstDash val="solid"/>
+                      <a:round/>
+                      <a:headEnd type="none" w="med" len="med"/>
+                      <a:tailEnd type="none" w="med" len="med"/>
+                    </a:lnL>
+                    <a:lnR w="12700" cap="flat" cmpd="sng" algn="ctr">
+                      <a:solidFill>
+                        <a:schemeClr val="tx1"/>
+                      </a:solidFill>
+                      <a:prstDash val="solid"/>
+                      <a:round/>
+                      <a:headEnd type="none" w="med" len="med"/>
+                      <a:tailEnd type="none" w="med" len="med"/>
+                    </a:lnR>
+                    <a:lnT w="12700" cap="flat" cmpd="sng" algn="ctr">
+                      <a:solidFill>
+                        <a:schemeClr val="tx1"/>
+                      </a:solidFill>
+                      <a:prstDash val="solid"/>
+                      <a:round/>
+                      <a:headEnd type="none" w="med" len="med"/>
+                      <a:tailEnd type="none" w="med" len="med"/>
+                    </a:lnT>
+                    <a:lnB w="12700" cap="flat" cmpd="sng" algn="ctr">
+                      <a:solidFill>
+                        <a:schemeClr val="tx1"/>
+                      </a:solidFill>
+                      <a:prstDash val="solid"/>
+                      <a:round/>
+                      <a:headEnd type="none" w="med" len="med"/>
+                      <a:tailEnd type="none" w="med" len="med"/>
+                    </a:lnB>
+                  </a:tcPr>
+                </a:tc>
+                <a:extLst>
+                  <a:ext uri="{0D108BD9-81ED-4DB2-BD59-A6C34878D82A}">
+                    <a16:rowId xmlns:a16="http://schemas.microsoft.com/office/drawing/2014/main" val="2126829040"/>
+                  </a:ext>
+                </a:extLst>
+              </a:tr>
+              <a:tr h="989305">
+                <a:tc>
+                  <a:txBody>
+                    <a:bodyPr/>
+                    <a:lstStyle/>
+                    <a:p>
+                      <a:pPr algn="ctr" rtl="1"/>
+                      <a:r>
+                        <a:rPr lang="en-US" dirty="0"/>
+                        <a:t>Value:</a:t>
+                      </a:r>
+                      <a:br>
+                        <a:rPr lang="en-US" dirty="0"/>
+                      </a:br>
+                      <a:r>
+                        <a:rPr lang="en-US" dirty="0"/>
+                        <a:t>CRC8</a:t>
+                      </a:r>
+                      <a:endParaRPr lang="he-IL" dirty="0"/>
+                    </a:p>
+                  </a:txBody>
+                  <a:tcPr>
+                    <a:lnL w="12700" cap="flat" cmpd="sng" algn="ctr">
+                      <a:solidFill>
+                        <a:schemeClr val="tx1"/>
+                      </a:solidFill>
+                      <a:prstDash val="solid"/>
+                      <a:round/>
+                      <a:headEnd type="none" w="med" len="med"/>
+                      <a:tailEnd type="none" w="med" len="med"/>
+                    </a:lnL>
+                    <a:lnR w="12700" cap="flat" cmpd="sng" algn="ctr">
+                      <a:solidFill>
+                        <a:schemeClr val="tx1"/>
+                      </a:solidFill>
+                      <a:prstDash val="solid"/>
+                      <a:round/>
+                      <a:headEnd type="none" w="med" len="med"/>
+                      <a:tailEnd type="none" w="med" len="med"/>
+                    </a:lnR>
+                    <a:lnT w="12700" cap="flat" cmpd="sng" algn="ctr">
+                      <a:solidFill>
+                        <a:schemeClr val="tx1"/>
+                      </a:solidFill>
+                      <a:prstDash val="solid"/>
+                      <a:round/>
+                      <a:headEnd type="none" w="med" len="med"/>
+                      <a:tailEnd type="none" w="med" len="med"/>
+                    </a:lnT>
+                    <a:lnB w="12700" cap="flat" cmpd="sng" algn="ctr">
+                      <a:solidFill>
+                        <a:schemeClr val="tx1"/>
+                      </a:solidFill>
+                      <a:prstDash val="solid"/>
+                      <a:round/>
+                      <a:headEnd type="none" w="med" len="med"/>
+                      <a:tailEnd type="none" w="med" len="med"/>
+                    </a:lnB>
+                    <a:solidFill>
+                      <a:srgbClr val="FF0000"/>
+                    </a:solidFill>
+                  </a:tcPr>
+                </a:tc>
+                <a:tc>
+                  <a:txBody>
+                    <a:bodyPr/>
+                    <a:lstStyle/>
+                    <a:p>
+                      <a:pPr algn="ctr" rtl="1"/>
+                      <a:r>
+                        <a:rPr lang="en-US" dirty="0"/>
+                        <a:t>Value:</a:t>
+                      </a:r>
+                      <a:br>
+                        <a:rPr lang="en-US" dirty="0"/>
+                      </a:br>
+                      <a:r>
+                        <a:rPr lang="en-US" dirty="0"/>
+                        <a:t>00000000</a:t>
+                      </a:r>
+                      <a:endParaRPr lang="he-IL" dirty="0"/>
+                    </a:p>
+                  </a:txBody>
+                  <a:tcPr>
+                    <a:lnL w="12700" cap="flat" cmpd="sng" algn="ctr">
+                      <a:solidFill>
+                        <a:schemeClr val="tx1"/>
+                      </a:solidFill>
+                      <a:prstDash val="solid"/>
+                      <a:round/>
+                      <a:headEnd type="none" w="med" len="med"/>
+                      <a:tailEnd type="none" w="med" len="med"/>
+                    </a:lnL>
+                    <a:lnR w="12700" cap="flat" cmpd="sng" algn="ctr">
+                      <a:solidFill>
+                        <a:schemeClr val="tx1"/>
+                      </a:solidFill>
+                      <a:prstDash val="solid"/>
+                      <a:round/>
+                      <a:headEnd type="none" w="med" len="med"/>
+                      <a:tailEnd type="none" w="med" len="med"/>
+                    </a:lnR>
+                    <a:lnT w="12700" cap="flat" cmpd="sng" algn="ctr">
+                      <a:solidFill>
+                        <a:schemeClr val="tx1"/>
+                      </a:solidFill>
+                      <a:prstDash val="solid"/>
+                      <a:round/>
+                      <a:headEnd type="none" w="med" len="med"/>
+                      <a:tailEnd type="none" w="med" len="med"/>
+                    </a:lnT>
+                    <a:lnB w="12700" cap="flat" cmpd="sng" algn="ctr">
+                      <a:solidFill>
+                        <a:schemeClr val="tx1"/>
+                      </a:solidFill>
+                      <a:prstDash val="solid"/>
+                      <a:round/>
+                      <a:headEnd type="none" w="med" len="med"/>
+                      <a:tailEnd type="none" w="med" len="med"/>
+                    </a:lnB>
+                    <a:lnTlToBr w="12700" cmpd="sng">
+                      <a:noFill/>
+                      <a:prstDash val="solid"/>
+                    </a:lnTlToBr>
+                    <a:lnBlToTr w="12700" cmpd="sng">
+                      <a:noFill/>
+                      <a:prstDash val="solid"/>
+                    </a:lnBlToTr>
+                    <a:solidFill>
+                      <a:schemeClr val="accent2">
+                        <a:lumMod val="60000"/>
+                        <a:lumOff val="40000"/>
+                      </a:schemeClr>
+                    </a:solidFill>
+                  </a:tcPr>
+                </a:tc>
+                <a:tc>
+                  <a:txBody>
+                    <a:bodyPr/>
+                    <a:lstStyle/>
+                    <a:p>
+                      <a:pPr algn="ctr" rtl="1"/>
+                      <a:r>
+                        <a:rPr lang="en-US" dirty="0"/>
+                        <a:t>Value:</a:t>
+                      </a:r>
+                      <a:br>
+                        <a:rPr lang="en-US" dirty="0"/>
+                      </a:br>
+                      <a:r>
+                        <a:rPr lang="en-US" dirty="0"/>
+                        <a:t>8bits</a:t>
+                      </a:r>
+                      <a:endParaRPr lang="he-IL" dirty="0"/>
+                    </a:p>
+                  </a:txBody>
+                  <a:tcPr>
+                    <a:lnL w="12700" cap="flat" cmpd="sng" algn="ctr">
+                      <a:solidFill>
+                        <a:schemeClr val="tx1"/>
+                      </a:solidFill>
+                      <a:prstDash val="solid"/>
+                      <a:round/>
+                      <a:headEnd type="none" w="med" len="med"/>
+                      <a:tailEnd type="none" w="med" len="med"/>
+                    </a:lnL>
+                    <a:lnR w="12700" cap="flat" cmpd="sng" algn="ctr">
+                      <a:solidFill>
+                        <a:schemeClr val="tx1"/>
+                      </a:solidFill>
+                      <a:prstDash val="solid"/>
+                      <a:round/>
+                      <a:headEnd type="none" w="med" len="med"/>
+                      <a:tailEnd type="none" w="med" len="med"/>
+                    </a:lnR>
+                    <a:lnT w="12700" cap="flat" cmpd="sng" algn="ctr">
+                      <a:solidFill>
+                        <a:schemeClr val="tx1"/>
+                      </a:solidFill>
+                      <a:prstDash val="solid"/>
+                      <a:round/>
+                      <a:headEnd type="none" w="med" len="med"/>
+                      <a:tailEnd type="none" w="med" len="med"/>
+                    </a:lnT>
+                    <a:lnB w="12700" cap="flat" cmpd="sng" algn="ctr">
+                      <a:solidFill>
+                        <a:schemeClr val="tx1"/>
+                      </a:solidFill>
+                      <a:prstDash val="solid"/>
+                      <a:round/>
+                      <a:headEnd type="none" w="med" len="med"/>
+                      <a:tailEnd type="none" w="med" len="med"/>
+                    </a:lnB>
+                    <a:lnTlToBr w="12700" cmpd="sng">
+                      <a:noFill/>
+                      <a:prstDash val="solid"/>
+                    </a:lnTlToBr>
+                    <a:lnBlToTr w="12700" cmpd="sng">
+                      <a:noFill/>
+                      <a:prstDash val="solid"/>
+                    </a:lnBlToTr>
+                    <a:solidFill>
+                      <a:schemeClr val="accent2">
+                        <a:lumMod val="60000"/>
+                        <a:lumOff val="40000"/>
+                      </a:schemeClr>
+                    </a:solidFill>
+                  </a:tcPr>
+                </a:tc>
+                <a:tc>
+                  <a:txBody>
+                    <a:bodyPr/>
+                    <a:lstStyle/>
+                    <a:p>
+                      <a:pPr algn="ctr" rtl="1"/>
+                      <a:r>
+                        <a:rPr lang="en-US" dirty="0"/>
+                        <a:t>Value:</a:t>
+                      </a:r>
+                      <a:br>
+                        <a:rPr lang="en-US" dirty="0"/>
+                      </a:br>
+                      <a:r>
+                        <a:rPr lang="en-US" dirty="0"/>
+                        <a:t>8bits</a:t>
+                      </a:r>
+                      <a:endParaRPr lang="he-IL" dirty="0"/>
+                    </a:p>
+                  </a:txBody>
+                  <a:tcPr>
+                    <a:lnL w="12700" cap="flat" cmpd="sng" algn="ctr">
+                      <a:solidFill>
+                        <a:schemeClr val="tx1"/>
+                      </a:solidFill>
+                      <a:prstDash val="solid"/>
+                      <a:round/>
+                      <a:headEnd type="none" w="med" len="med"/>
+                      <a:tailEnd type="none" w="med" len="med"/>
+                    </a:lnL>
+                    <a:lnR w="12700" cap="flat" cmpd="sng" algn="ctr">
+                      <a:solidFill>
+                        <a:schemeClr val="tx1"/>
+                      </a:solidFill>
+                      <a:prstDash val="solid"/>
+                      <a:round/>
+                      <a:headEnd type="none" w="med" len="med"/>
+                      <a:tailEnd type="none" w="med" len="med"/>
+                    </a:lnR>
+                    <a:lnT w="12700" cap="flat" cmpd="sng" algn="ctr">
+                      <a:solidFill>
+                        <a:schemeClr val="tx1"/>
+                      </a:solidFill>
+                      <a:prstDash val="solid"/>
+                      <a:round/>
+                      <a:headEnd type="none" w="med" len="med"/>
+                      <a:tailEnd type="none" w="med" len="med"/>
+                    </a:lnT>
+                    <a:lnB w="12700" cap="flat" cmpd="sng" algn="ctr">
+                      <a:solidFill>
+                        <a:schemeClr val="tx1"/>
+                      </a:solidFill>
+                      <a:prstDash val="solid"/>
+                      <a:round/>
+                      <a:headEnd type="none" w="med" len="med"/>
+                      <a:tailEnd type="none" w="med" len="med"/>
+                    </a:lnB>
+                    <a:lnTlToBr w="12700" cmpd="sng">
+                      <a:noFill/>
+                      <a:prstDash val="solid"/>
+                    </a:lnTlToBr>
+                    <a:lnBlToTr w="12700" cmpd="sng">
+                      <a:noFill/>
+                      <a:prstDash val="solid"/>
+                    </a:lnBlToTr>
+                    <a:solidFill>
+                      <a:schemeClr val="accent2">
+                        <a:lumMod val="60000"/>
+                        <a:lumOff val="40000"/>
+                      </a:schemeClr>
+                    </a:solidFill>
+                  </a:tcPr>
+                </a:tc>
+                <a:tc>
+                  <a:txBody>
+                    <a:bodyPr/>
+                    <a:lstStyle/>
+                    <a:p>
+                      <a:pPr algn="ctr" rtl="1"/>
+                      <a:r>
+                        <a:rPr lang="en-US" dirty="0"/>
+                        <a:t>Value:</a:t>
+                      </a:r>
+                      <a:br>
+                        <a:rPr lang="en-US" dirty="0"/>
+                      </a:br>
+                      <a:r>
+                        <a:rPr lang="en-US" dirty="0"/>
+                        <a:t>8bits</a:t>
+                      </a:r>
+                      <a:endParaRPr lang="he-IL" dirty="0"/>
+                    </a:p>
+                  </a:txBody>
+                  <a:tcPr>
+                    <a:lnL w="12700" cap="flat" cmpd="sng" algn="ctr">
+                      <a:solidFill>
+                        <a:schemeClr val="tx1"/>
+                      </a:solidFill>
+                      <a:prstDash val="solid"/>
+                      <a:round/>
+                      <a:headEnd type="none" w="med" len="med"/>
+                      <a:tailEnd type="none" w="med" len="med"/>
+                    </a:lnL>
+                    <a:lnR w="12700" cap="flat" cmpd="sng" algn="ctr">
+                      <a:solidFill>
+                        <a:schemeClr val="tx1"/>
+                      </a:solidFill>
+                      <a:prstDash val="solid"/>
+                      <a:round/>
+                      <a:headEnd type="none" w="med" len="med"/>
+                      <a:tailEnd type="none" w="med" len="med"/>
+                    </a:lnR>
+                    <a:lnT w="12700" cap="flat" cmpd="sng" algn="ctr">
+                      <a:solidFill>
+                        <a:schemeClr val="tx1"/>
+                      </a:solidFill>
+                      <a:prstDash val="solid"/>
+                      <a:round/>
+                      <a:headEnd type="none" w="med" len="med"/>
+                      <a:tailEnd type="none" w="med" len="med"/>
+                    </a:lnT>
+                    <a:lnB w="12700" cap="flat" cmpd="sng" algn="ctr">
+                      <a:solidFill>
+                        <a:schemeClr val="tx1"/>
+                      </a:solidFill>
+                      <a:prstDash val="solid"/>
+                      <a:round/>
+                      <a:headEnd type="none" w="med" len="med"/>
+                      <a:tailEnd type="none" w="med" len="med"/>
+                    </a:lnB>
+                    <a:lnTlToBr w="12700" cmpd="sng">
+                      <a:noFill/>
+                      <a:prstDash val="solid"/>
+                    </a:lnTlToBr>
+                    <a:lnBlToTr w="12700" cmpd="sng">
+                      <a:noFill/>
+                      <a:prstDash val="solid"/>
+                    </a:lnBlToTr>
+                    <a:solidFill>
+                      <a:schemeClr val="accent2">
+                        <a:lumMod val="60000"/>
+                        <a:lumOff val="40000"/>
+                      </a:schemeClr>
+                    </a:solidFill>
+                  </a:tcPr>
+                </a:tc>
+                <a:tc>
+                  <a:txBody>
+                    <a:bodyPr/>
+                    <a:lstStyle/>
+                    <a:p>
+                      <a:pPr algn="ctr" rtl="1"/>
+                      <a:r>
+                        <a:rPr lang="en-US" dirty="0"/>
+                        <a:t>Value:</a:t>
+                      </a:r>
+                      <a:br>
+                        <a:rPr lang="en-US" dirty="0"/>
+                      </a:br>
+                      <a:r>
+                        <a:rPr lang="en-US" dirty="0"/>
+                        <a:t>8bits</a:t>
+                      </a:r>
+                      <a:endParaRPr lang="he-IL" dirty="0"/>
+                    </a:p>
+                  </a:txBody>
+                  <a:tcPr>
+                    <a:lnL w="12700" cap="flat" cmpd="sng" algn="ctr">
+                      <a:solidFill>
+                        <a:schemeClr val="tx1"/>
+                      </a:solidFill>
+                      <a:prstDash val="solid"/>
+                      <a:round/>
+                      <a:headEnd type="none" w="med" len="med"/>
+                      <a:tailEnd type="none" w="med" len="med"/>
+                    </a:lnL>
+                    <a:lnR w="12700" cap="flat" cmpd="sng" algn="ctr">
+                      <a:solidFill>
+                        <a:schemeClr val="tx1"/>
+                      </a:solidFill>
+                      <a:prstDash val="solid"/>
+                      <a:round/>
+                      <a:headEnd type="none" w="med" len="med"/>
+                      <a:tailEnd type="none" w="med" len="med"/>
+                    </a:lnR>
+                    <a:lnT w="12700" cap="flat" cmpd="sng" algn="ctr">
+                      <a:solidFill>
+                        <a:schemeClr val="tx1"/>
+                      </a:solidFill>
+                      <a:prstDash val="solid"/>
+                      <a:round/>
+                      <a:headEnd type="none" w="med" len="med"/>
+                      <a:tailEnd type="none" w="med" len="med"/>
+                    </a:lnT>
+                    <a:lnB w="12700" cap="flat" cmpd="sng" algn="ctr">
+                      <a:solidFill>
+                        <a:schemeClr val="tx1"/>
+                      </a:solidFill>
+                      <a:prstDash val="solid"/>
+                      <a:round/>
+                      <a:headEnd type="none" w="med" len="med"/>
+                      <a:tailEnd type="none" w="med" len="med"/>
+                    </a:lnB>
+                    <a:lnTlToBr w="12700" cmpd="sng">
+                      <a:noFill/>
+                      <a:prstDash val="solid"/>
+                    </a:lnTlToBr>
+                    <a:lnBlToTr w="12700" cmpd="sng">
+                      <a:noFill/>
+                      <a:prstDash val="solid"/>
+                    </a:lnBlToTr>
+                    <a:solidFill>
+                      <a:schemeClr val="accent2">
+                        <a:lumMod val="60000"/>
+                        <a:lumOff val="40000"/>
+                      </a:schemeClr>
+                    </a:solidFill>
+                  </a:tcPr>
+                </a:tc>
+                <a:tc>
+                  <a:txBody>
+                    <a:bodyPr/>
+                    <a:lstStyle/>
+                    <a:p>
+                      <a:pPr algn="ctr" rtl="1"/>
+                      <a:r>
+                        <a:rPr lang="en-US" dirty="0"/>
+                        <a:t>Value:</a:t>
+                      </a:r>
+                      <a:br>
+                        <a:rPr lang="en-US" dirty="0"/>
+                      </a:br>
+                      <a:r>
+                        <a:rPr lang="en-US" dirty="0"/>
+                        <a:t>8bits</a:t>
+                      </a:r>
+                      <a:endParaRPr lang="he-IL" dirty="0"/>
+                    </a:p>
+                  </a:txBody>
+                  <a:tcPr>
+                    <a:lnL w="12700" cap="flat" cmpd="sng" algn="ctr">
+                      <a:solidFill>
+                        <a:schemeClr val="tx1"/>
+                      </a:solidFill>
+                      <a:prstDash val="solid"/>
+                      <a:round/>
+                      <a:headEnd type="none" w="med" len="med"/>
+                      <a:tailEnd type="none" w="med" len="med"/>
+                    </a:lnL>
+                    <a:lnR w="12700" cap="flat" cmpd="sng" algn="ctr">
+                      <a:solidFill>
+                        <a:schemeClr val="tx1"/>
+                      </a:solidFill>
+                      <a:prstDash val="solid"/>
+                      <a:round/>
+                      <a:headEnd type="none" w="med" len="med"/>
+                      <a:tailEnd type="none" w="med" len="med"/>
+                    </a:lnR>
+                    <a:lnT w="12700" cap="flat" cmpd="sng" algn="ctr">
+                      <a:solidFill>
+                        <a:schemeClr val="tx1"/>
+                      </a:solidFill>
+                      <a:prstDash val="solid"/>
+                      <a:round/>
+                      <a:headEnd type="none" w="med" len="med"/>
+                      <a:tailEnd type="none" w="med" len="med"/>
+                    </a:lnT>
+                    <a:lnB w="12700" cap="flat" cmpd="sng" algn="ctr">
+                      <a:solidFill>
+                        <a:schemeClr val="tx1"/>
+                      </a:solidFill>
+                      <a:prstDash val="solid"/>
+                      <a:round/>
+                      <a:headEnd type="none" w="med" len="med"/>
+                      <a:tailEnd type="none" w="med" len="med"/>
+                    </a:lnB>
+                    <a:lnTlToBr w="12700" cmpd="sng">
+                      <a:noFill/>
+                      <a:prstDash val="solid"/>
+                    </a:lnTlToBr>
+                    <a:lnBlToTr w="12700" cmpd="sng">
+                      <a:noFill/>
+                      <a:prstDash val="solid"/>
+                    </a:lnBlToTr>
+                    <a:solidFill>
+                      <a:schemeClr val="accent2">
+                        <a:lumMod val="60000"/>
+                        <a:lumOff val="40000"/>
+                      </a:schemeClr>
+                    </a:solidFill>
+                  </a:tcPr>
+                </a:tc>
+                <a:tc>
+                  <a:txBody>
+                    <a:bodyPr/>
+                    <a:lstStyle/>
+                    <a:p>
+                      <a:pPr algn="ctr" rtl="1"/>
+                      <a:r>
+                        <a:rPr lang="en-US" dirty="0"/>
+                        <a:t>Value:</a:t>
+                      </a:r>
+                      <a:br>
+                        <a:rPr lang="en-US" dirty="0"/>
+                      </a:br>
+                      <a:r>
+                        <a:rPr lang="en-US" dirty="0"/>
+                        <a:t>0x0E</a:t>
+                      </a:r>
+                      <a:endParaRPr lang="he-IL" dirty="0"/>
+                    </a:p>
+                  </a:txBody>
+                  <a:tcPr>
+                    <a:lnL w="12700" cap="flat" cmpd="sng" algn="ctr">
+                      <a:solidFill>
+                        <a:schemeClr val="tx1"/>
+                      </a:solidFill>
+                      <a:prstDash val="solid"/>
+                      <a:round/>
+                      <a:headEnd type="none" w="med" len="med"/>
+                      <a:tailEnd type="none" w="med" len="med"/>
+                    </a:lnL>
+                    <a:lnR w="12700" cap="flat" cmpd="sng" algn="ctr">
+                      <a:solidFill>
+                        <a:schemeClr val="tx1"/>
+                      </a:solidFill>
+                      <a:prstDash val="solid"/>
+                      <a:round/>
+                      <a:headEnd type="none" w="med" len="med"/>
+                      <a:tailEnd type="none" w="med" len="med"/>
+                    </a:lnR>
+                    <a:lnT w="12700" cap="flat" cmpd="sng" algn="ctr">
+                      <a:solidFill>
+                        <a:schemeClr val="tx1"/>
+                      </a:solidFill>
+                      <a:prstDash val="solid"/>
+                      <a:round/>
+                      <a:headEnd type="none" w="med" len="med"/>
+                      <a:tailEnd type="none" w="med" len="med"/>
+                    </a:lnT>
+                    <a:lnB w="12700" cap="flat" cmpd="sng" algn="ctr">
+                      <a:solidFill>
+                        <a:schemeClr val="tx1"/>
+                      </a:solidFill>
+                      <a:prstDash val="solid"/>
+                      <a:round/>
+                      <a:headEnd type="none" w="med" len="med"/>
+                      <a:tailEnd type="none" w="med" len="med"/>
+                    </a:lnB>
+                    <a:solidFill>
+                      <a:srgbClr val="00B0F0"/>
+                    </a:solidFill>
+                  </a:tcPr>
+                </a:tc>
+                <a:extLst>
+                  <a:ext uri="{0D108BD9-81ED-4DB2-BD59-A6C34878D82A}">
+                    <a16:rowId xmlns:a16="http://schemas.microsoft.com/office/drawing/2014/main" val="3329294810"/>
+                  </a:ext>
+                </a:extLst>
+              </a:tr>
+            </a:tbl>
+          </a:graphicData>
+        </a:graphic>
+      </p:graphicFrame>
+      <p:sp>
+        <p:nvSpPr>
+          <p:cNvPr id="8" name="TextBox 7">
+            <a:extLst>
+              <a:ext uri="{FF2B5EF4-FFF2-40B4-BE49-F238E27FC236}">
+                <a16:creationId xmlns:a16="http://schemas.microsoft.com/office/drawing/2014/main" id="{22569E11-7B65-C19B-09B3-809BD0FE29DB}"/>
+              </a:ext>
+            </a:extLst>
+          </p:cNvPr>
+          <p:cNvSpPr txBox="1"/>
+          <p:nvPr/>
+        </p:nvSpPr>
+        <p:spPr>
+          <a:xfrm>
+            <a:off x="2558367" y="2190836"/>
+            <a:ext cx="6580682" cy="369332"/>
+          </a:xfrm>
+          <a:prstGeom prst="rect">
+            <a:avLst/>
+          </a:prstGeom>
+          <a:noFill/>
+        </p:spPr>
+        <p:txBody>
+          <a:bodyPr wrap="square" rtlCol="1">
+            <a:spAutoFit/>
+          </a:bodyPr>
+          <a:lstStyle/>
+          <a:p>
+            <a:pPr algn="ctr"/>
+            <a:r>
+              <a:rPr lang="en-US" b="1" dirty="0"/>
+              <a:t>Forward Chain Path and Explicit ID Accumulation Structure</a:t>
+            </a:r>
+            <a:endParaRPr lang="he-IL" b="1" dirty="0"/>
+          </a:p>
+        </p:txBody>
+      </p:sp>
+    </p:spTree>
+    <p:extLst>
+      <p:ext uri="{BB962C8B-B14F-4D97-AF65-F5344CB8AC3E}">
+        <p14:creationId xmlns:p14="http://schemas.microsoft.com/office/powerpoint/2010/main" val="715815582"/>
+      </p:ext>
+    </p:extLst>
+  </p:cSld>
+  <p:clrMapOvr>
+    <a:masterClrMapping/>
+  </p:clrMapOvr>
+</p:sld>
+</file>
+
+<file path=ppt/slides/slide3.xml><?xml version="1.0" encoding="utf-8"?>
+<p:sld xmlns:a="http://schemas.openxmlformats.org/drawingml/2006/main" xmlns:r="http://schemas.openxmlformats.org/officeDocument/2006/relationships" xmlns:p="http://schemas.openxmlformats.org/presentationml/2006/main">
+  <p:cSld>
+    <p:spTree>
+      <p:nvGrpSpPr>
+        <p:cNvPr id="1" name="">
+          <a:extLst>
+            <a:ext uri="{FF2B5EF4-FFF2-40B4-BE49-F238E27FC236}">
+              <a16:creationId xmlns:a16="http://schemas.microsoft.com/office/drawing/2014/main" id="{CEE4F447-F368-A20F-D099-39E3E98C6239}"/>
+            </a:ext>
+          </a:extLst>
+        </p:cNvPr>
+        <p:cNvGrpSpPr/>
+        <p:nvPr/>
+      </p:nvGrpSpPr>
+      <p:grpSpPr>
+        <a:xfrm>
+          <a:off x="0" y="0"/>
+          <a:ext cx="0" cy="0"/>
+          <a:chOff x="0" y="0"/>
+          <a:chExt cx="0" cy="0"/>
+        </a:xfrm>
+      </p:grpSpPr>
+      <p:graphicFrame>
+        <p:nvGraphicFramePr>
+          <p:cNvPr id="4" name="Table 3">
+            <a:extLst>
+              <a:ext uri="{FF2B5EF4-FFF2-40B4-BE49-F238E27FC236}">
+                <a16:creationId xmlns:a16="http://schemas.microsoft.com/office/drawing/2014/main" id="{F8C9074B-81DB-524B-1DA1-970D7D6B8991}"/>
+              </a:ext>
+            </a:extLst>
+          </p:cNvPr>
+          <p:cNvGraphicFramePr>
+            <a:graphicFrameLocks noGrp="1"/>
+          </p:cNvGraphicFramePr>
+          <p:nvPr/>
+        </p:nvGraphicFramePr>
+        <p:xfrm>
+          <a:off x="715991" y="2652317"/>
+          <a:ext cx="10265434" cy="1903705"/>
+        </p:xfrm>
+        <a:graphic>
+          <a:graphicData uri="http://schemas.openxmlformats.org/drawingml/2006/table">
+            <a:tbl>
+              <a:tblPr rtl="1" firstRow="1" bandRow="1">
+                <a:tableStyleId>{5C22544A-7EE6-4342-B048-85BDC9FD1C3A}</a:tableStyleId>
+              </a:tblPr>
+              <a:tblGrid>
+                <a:gridCol w="1538749">
+                  <a:extLst>
+                    <a:ext uri="{9D8B030D-6E8A-4147-A177-3AD203B41FA5}">
+                      <a16:colId xmlns:a16="http://schemas.microsoft.com/office/drawing/2014/main" val="955862198"/>
+                    </a:ext>
+                  </a:extLst>
+                </a:gridCol>
+                <a:gridCol w="1178571">
+                  <a:extLst>
+                    <a:ext uri="{9D8B030D-6E8A-4147-A177-3AD203B41FA5}">
+                      <a16:colId xmlns:a16="http://schemas.microsoft.com/office/drawing/2014/main" val="1687635297"/>
+                    </a:ext>
+                  </a:extLst>
+                </a:gridCol>
+                <a:gridCol w="924020">
+                  <a:extLst>
+                    <a:ext uri="{9D8B030D-6E8A-4147-A177-3AD203B41FA5}">
+                      <a16:colId xmlns:a16="http://schemas.microsoft.com/office/drawing/2014/main" val="2620613503"/>
+                    </a:ext>
+                  </a:extLst>
+                </a:gridCol>
+                <a:gridCol w="1051296">
+                  <a:extLst>
+                    <a:ext uri="{9D8B030D-6E8A-4147-A177-3AD203B41FA5}">
+                      <a16:colId xmlns:a16="http://schemas.microsoft.com/office/drawing/2014/main" val="1760604788"/>
+                    </a:ext>
+                  </a:extLst>
+                </a:gridCol>
+                <a:gridCol w="1051296">
+                  <a:extLst>
+                    <a:ext uri="{9D8B030D-6E8A-4147-A177-3AD203B41FA5}">
+                      <a16:colId xmlns:a16="http://schemas.microsoft.com/office/drawing/2014/main" val="1100616153"/>
+                    </a:ext>
+                  </a:extLst>
+                </a:gridCol>
+                <a:gridCol w="1051295">
+                  <a:extLst>
+                    <a:ext uri="{9D8B030D-6E8A-4147-A177-3AD203B41FA5}">
+                      <a16:colId xmlns:a16="http://schemas.microsoft.com/office/drawing/2014/main" val="1970551147"/>
+                    </a:ext>
+                  </a:extLst>
+                </a:gridCol>
+                <a:gridCol w="1051296">
+                  <a:extLst>
+                    <a:ext uri="{9D8B030D-6E8A-4147-A177-3AD203B41FA5}">
+                      <a16:colId xmlns:a16="http://schemas.microsoft.com/office/drawing/2014/main" val="2554382947"/>
+                    </a:ext>
+                  </a:extLst>
+                </a:gridCol>
+                <a:gridCol w="2418911">
+                  <a:extLst>
+                    <a:ext uri="{9D8B030D-6E8A-4147-A177-3AD203B41FA5}">
+                      <a16:colId xmlns:a16="http://schemas.microsoft.com/office/drawing/2014/main" val="1617877242"/>
+                    </a:ext>
+                  </a:extLst>
+                </a:gridCol>
+              </a:tblGrid>
+              <a:tr h="0">
+                <a:tc>
+                  <a:txBody>
+                    <a:bodyPr/>
+                    <a:lstStyle/>
+                    <a:p>
+                      <a:pPr algn="ctr" rtl="1"/>
+                      <a:r>
+                        <a:rPr lang="en-US" dirty="0"/>
+                        <a:t>8bits CRC8</a:t>
+                      </a:r>
+                      <a:endParaRPr lang="he-IL" dirty="0"/>
+                    </a:p>
+                  </a:txBody>
+                  <a:tcPr>
+                    <a:lnL w="12700" cap="flat" cmpd="sng" algn="ctr">
+                      <a:solidFill>
+                        <a:schemeClr val="tx1"/>
+                      </a:solidFill>
+                      <a:prstDash val="solid"/>
+                      <a:round/>
+                      <a:headEnd type="none" w="med" len="med"/>
+                      <a:tailEnd type="none" w="med" len="med"/>
+                    </a:lnL>
+                    <a:lnR w="12700" cap="flat" cmpd="sng" algn="ctr">
+                      <a:solidFill>
+                        <a:schemeClr val="tx1"/>
+                      </a:solidFill>
+                      <a:prstDash val="solid"/>
+                      <a:round/>
+                      <a:headEnd type="none" w="med" len="med"/>
+                      <a:tailEnd type="none" w="med" len="med"/>
+                    </a:lnR>
+                    <a:lnT w="12700" cap="flat" cmpd="sng" algn="ctr">
+                      <a:solidFill>
+                        <a:schemeClr val="tx1"/>
+                      </a:solidFill>
+                      <a:prstDash val="solid"/>
+                      <a:round/>
+                      <a:headEnd type="none" w="med" len="med"/>
+                      <a:tailEnd type="none" w="med" len="med"/>
+                    </a:lnT>
+                    <a:lnB w="12700" cap="flat" cmpd="sng" algn="ctr">
+                      <a:solidFill>
+                        <a:schemeClr val="tx1"/>
+                      </a:solidFill>
+                      <a:prstDash val="solid"/>
+                      <a:round/>
+                      <a:headEnd type="none" w="med" len="med"/>
+                      <a:tailEnd type="none" w="med" len="med"/>
+                    </a:lnB>
+                    <a:solidFill>
+                      <a:srgbClr val="C00000"/>
+                    </a:solidFill>
+                  </a:tcPr>
+                </a:tc>
+                <a:tc>
+                  <a:txBody>
+                    <a:bodyPr/>
+                    <a:lstStyle/>
+                    <a:p>
+                      <a:pPr marL="0" marR="0" lvl="0" indent="0" algn="ctr" defTabSz="914400" rtl="1" eaLnBrk="1" fontAlgn="auto" latinLnBrk="0" hangingPunct="1">
+                        <a:lnSpc>
+                          <a:spcPct val="100000"/>
+                        </a:lnSpc>
+                        <a:spcBef>
+                          <a:spcPts val="0"/>
+                        </a:spcBef>
+                        <a:spcAft>
+                          <a:spcPts val="0"/>
+                        </a:spcAft>
+                        <a:buClrTx/>
+                        <a:buSzTx/>
+                        <a:buFontTx/>
+                        <a:buNone/>
+                        <a:tabLst/>
+                        <a:defRPr/>
+                      </a:pPr>
+                      <a:r>
+                        <a:rPr lang="en-US" dirty="0"/>
+                        <a:t>Target ID</a:t>
+                      </a:r>
+                      <a:endParaRPr lang="he-IL" dirty="0"/>
+                    </a:p>
+                  </a:txBody>
+                  <a:tcPr>
+                    <a:lnL w="12700" cap="flat" cmpd="sng" algn="ctr">
+                      <a:solidFill>
+                        <a:schemeClr val="tx1"/>
+                      </a:solidFill>
+                      <a:prstDash val="solid"/>
+                      <a:round/>
+                      <a:headEnd type="none" w="med" len="med"/>
+                      <a:tailEnd type="none" w="med" len="med"/>
+                    </a:lnL>
+                    <a:lnR w="12700" cap="flat" cmpd="sng" algn="ctr">
+                      <a:solidFill>
+                        <a:schemeClr val="tx1"/>
+                      </a:solidFill>
+                      <a:prstDash val="solid"/>
+                      <a:round/>
+                      <a:headEnd type="none" w="med" len="med"/>
+                      <a:tailEnd type="none" w="med" len="med"/>
+                    </a:lnR>
+                    <a:lnT w="12700" cap="flat" cmpd="sng" algn="ctr">
+                      <a:solidFill>
+                        <a:schemeClr val="tx1"/>
+                      </a:solidFill>
+                      <a:prstDash val="solid"/>
+                      <a:round/>
+                      <a:headEnd type="none" w="med" len="med"/>
+                      <a:tailEnd type="none" w="med" len="med"/>
+                    </a:lnT>
+                    <a:lnB w="12700" cap="flat" cmpd="sng" algn="ctr">
+                      <a:solidFill>
+                        <a:schemeClr val="tx1"/>
+                      </a:solidFill>
+                      <a:prstDash val="solid"/>
+                      <a:round/>
+                      <a:headEnd type="none" w="med" len="med"/>
+                      <a:tailEnd type="none" w="med" len="med"/>
+                    </a:lnB>
+                    <a:lnTlToBr w="12700" cmpd="sng">
+                      <a:noFill/>
+                      <a:prstDash val="solid"/>
+                    </a:lnTlToBr>
+                    <a:lnBlToTr w="12700" cmpd="sng">
+                      <a:noFill/>
+                      <a:prstDash val="solid"/>
+                    </a:lnBlToTr>
+                    <a:solidFill>
+                      <a:schemeClr val="accent2">
+                        <a:lumMod val="75000"/>
+                      </a:schemeClr>
+                    </a:solidFill>
+                  </a:tcPr>
+                </a:tc>
+                <a:tc>
+                  <a:txBody>
+                    <a:bodyPr/>
+                    <a:lstStyle/>
+                    <a:p>
+                      <a:pPr marL="0" marR="0" lvl="0" indent="0" algn="l" defTabSz="914400" rtl="1" eaLnBrk="1" fontAlgn="auto" latinLnBrk="0" hangingPunct="1">
+                        <a:lnSpc>
+                          <a:spcPct val="100000"/>
+                        </a:lnSpc>
+                        <a:spcBef>
+                          <a:spcPts val="0"/>
+                        </a:spcBef>
+                        <a:spcAft>
+                          <a:spcPts val="0"/>
+                        </a:spcAft>
+                        <a:buClrTx/>
+                        <a:buSzTx/>
+                        <a:buFontTx/>
+                        <a:buNone/>
+                        <a:tabLst/>
+                        <a:defRPr/>
+                      </a:pPr>
+                      <a:r>
+                        <a:rPr lang="en-US" dirty="0"/>
+                        <a:t>Device 5 Id</a:t>
+                      </a:r>
+                      <a:endParaRPr lang="he-IL" dirty="0"/>
+                    </a:p>
+                    <a:p>
+                      <a:pPr rtl="1"/>
+                      <a:endParaRPr lang="he-IL" dirty="0"/>
+                    </a:p>
+                  </a:txBody>
+                  <a:tcPr>
+                    <a:lnL w="12700" cap="flat" cmpd="sng" algn="ctr">
+                      <a:solidFill>
+                        <a:schemeClr val="tx1"/>
+                      </a:solidFill>
+                      <a:prstDash val="solid"/>
+                      <a:round/>
+                      <a:headEnd type="none" w="med" len="med"/>
+                      <a:tailEnd type="none" w="med" len="med"/>
+                    </a:lnL>
+                    <a:lnR w="12700" cap="flat" cmpd="sng" algn="ctr">
+                      <a:solidFill>
+                        <a:schemeClr val="tx1"/>
+                      </a:solidFill>
+                      <a:prstDash val="solid"/>
+                      <a:round/>
+                      <a:headEnd type="none" w="med" len="med"/>
+                      <a:tailEnd type="none" w="med" len="med"/>
+                    </a:lnR>
+                    <a:lnT w="12700" cap="flat" cmpd="sng" algn="ctr">
+                      <a:solidFill>
+                        <a:schemeClr val="tx1"/>
+                      </a:solidFill>
+                      <a:prstDash val="solid"/>
+                      <a:round/>
+                      <a:headEnd type="none" w="med" len="med"/>
+                      <a:tailEnd type="none" w="med" len="med"/>
+                    </a:lnT>
+                    <a:lnB w="12700" cap="flat" cmpd="sng" algn="ctr">
+                      <a:solidFill>
+                        <a:schemeClr val="tx1"/>
+                      </a:solidFill>
+                      <a:prstDash val="solid"/>
+                      <a:round/>
+                      <a:headEnd type="none" w="med" len="med"/>
+                      <a:tailEnd type="none" w="med" len="med"/>
+                    </a:lnB>
+                    <a:lnTlToBr w="12700" cmpd="sng">
+                      <a:noFill/>
+                      <a:prstDash val="solid"/>
+                    </a:lnTlToBr>
+                    <a:lnBlToTr w="12700" cmpd="sng">
+                      <a:noFill/>
+                      <a:prstDash val="solid"/>
+                    </a:lnBlToTr>
+                    <a:solidFill>
+                      <a:schemeClr val="accent2">
+                        <a:lumMod val="75000"/>
+                      </a:schemeClr>
+                    </a:solidFill>
+                  </a:tcPr>
+                </a:tc>
+                <a:tc>
+                  <a:txBody>
+                    <a:bodyPr/>
+                    <a:lstStyle/>
+                    <a:p>
+                      <a:pPr marL="0" marR="0" lvl="0" indent="0" algn="l" defTabSz="914400" rtl="1" eaLnBrk="1" fontAlgn="auto" latinLnBrk="0" hangingPunct="1">
+                        <a:lnSpc>
+                          <a:spcPct val="100000"/>
+                        </a:lnSpc>
+                        <a:spcBef>
+                          <a:spcPts val="0"/>
+                        </a:spcBef>
+                        <a:spcAft>
+                          <a:spcPts val="0"/>
+                        </a:spcAft>
+                        <a:buClrTx/>
+                        <a:buSzTx/>
+                        <a:buFontTx/>
+                        <a:buNone/>
+                        <a:tabLst/>
+                        <a:defRPr/>
+                      </a:pPr>
+                      <a:r>
+                        <a:rPr lang="en-US" dirty="0"/>
+                        <a:t>Device 4 Id</a:t>
+                      </a:r>
+                      <a:endParaRPr lang="he-IL" dirty="0"/>
+                    </a:p>
+                    <a:p>
+                      <a:pPr rtl="1"/>
+                      <a:endParaRPr lang="he-IL" dirty="0"/>
+                    </a:p>
+                  </a:txBody>
+                  <a:tcPr>
+                    <a:lnL w="12700" cap="flat" cmpd="sng" algn="ctr">
+                      <a:solidFill>
+                        <a:schemeClr val="tx1"/>
+                      </a:solidFill>
+                      <a:prstDash val="solid"/>
+                      <a:round/>
+                      <a:headEnd type="none" w="med" len="med"/>
+                      <a:tailEnd type="none" w="med" len="med"/>
+                    </a:lnL>
+                    <a:lnR w="12700" cap="flat" cmpd="sng" algn="ctr">
+                      <a:solidFill>
+                        <a:schemeClr val="tx1"/>
+                      </a:solidFill>
+                      <a:prstDash val="solid"/>
+                      <a:round/>
+                      <a:headEnd type="none" w="med" len="med"/>
+                      <a:tailEnd type="none" w="med" len="med"/>
+                    </a:lnR>
+                    <a:lnT w="12700" cap="flat" cmpd="sng" algn="ctr">
+                      <a:solidFill>
+                        <a:schemeClr val="tx1"/>
+                      </a:solidFill>
+                      <a:prstDash val="solid"/>
+                      <a:round/>
+                      <a:headEnd type="none" w="med" len="med"/>
+                      <a:tailEnd type="none" w="med" len="med"/>
+                    </a:lnT>
+                    <a:lnB w="12700" cap="flat" cmpd="sng" algn="ctr">
+                      <a:solidFill>
+                        <a:schemeClr val="tx1"/>
+                      </a:solidFill>
+                      <a:prstDash val="solid"/>
+                      <a:round/>
+                      <a:headEnd type="none" w="med" len="med"/>
+                      <a:tailEnd type="none" w="med" len="med"/>
+                    </a:lnB>
+                    <a:lnTlToBr w="12700" cmpd="sng">
+                      <a:noFill/>
+                      <a:prstDash val="solid"/>
+                    </a:lnTlToBr>
+                    <a:lnBlToTr w="12700" cmpd="sng">
+                      <a:noFill/>
+                      <a:prstDash val="solid"/>
+                    </a:lnBlToTr>
+                    <a:solidFill>
+                      <a:schemeClr val="accent2">
+                        <a:lumMod val="75000"/>
+                      </a:schemeClr>
+                    </a:solidFill>
+                  </a:tcPr>
+                </a:tc>
+                <a:tc>
+                  <a:txBody>
+                    <a:bodyPr/>
+                    <a:lstStyle/>
+                    <a:p>
+                      <a:pPr marL="0" marR="0" lvl="0" indent="0" algn="l" defTabSz="914400" rtl="1" eaLnBrk="1" fontAlgn="auto" latinLnBrk="0" hangingPunct="1">
+                        <a:lnSpc>
+                          <a:spcPct val="100000"/>
+                        </a:lnSpc>
+                        <a:spcBef>
+                          <a:spcPts val="0"/>
+                        </a:spcBef>
+                        <a:spcAft>
+                          <a:spcPts val="0"/>
+                        </a:spcAft>
+                        <a:buClrTx/>
+                        <a:buSzTx/>
+                        <a:buFontTx/>
+                        <a:buNone/>
+                        <a:tabLst/>
+                        <a:defRPr/>
+                      </a:pPr>
+                      <a:r>
+                        <a:rPr lang="en-US" dirty="0"/>
+                        <a:t>Device 3 Id</a:t>
+                      </a:r>
+                      <a:endParaRPr lang="he-IL" dirty="0"/>
+                    </a:p>
+                    <a:p>
+                      <a:pPr rtl="1"/>
+                      <a:endParaRPr lang="he-IL" dirty="0"/>
+                    </a:p>
+                  </a:txBody>
+                  <a:tcPr>
+                    <a:lnL w="12700" cap="flat" cmpd="sng" algn="ctr">
+                      <a:solidFill>
+                        <a:schemeClr val="tx1"/>
+                      </a:solidFill>
+                      <a:prstDash val="solid"/>
+                      <a:round/>
+                      <a:headEnd type="none" w="med" len="med"/>
+                      <a:tailEnd type="none" w="med" len="med"/>
+                    </a:lnL>
+                    <a:lnR w="12700" cap="flat" cmpd="sng" algn="ctr">
+                      <a:solidFill>
+                        <a:schemeClr val="tx1"/>
+                      </a:solidFill>
+                      <a:prstDash val="solid"/>
+                      <a:round/>
+                      <a:headEnd type="none" w="med" len="med"/>
+                      <a:tailEnd type="none" w="med" len="med"/>
+                    </a:lnR>
+                    <a:lnT w="12700" cap="flat" cmpd="sng" algn="ctr">
+                      <a:solidFill>
+                        <a:schemeClr val="tx1"/>
+                      </a:solidFill>
+                      <a:prstDash val="solid"/>
+                      <a:round/>
+                      <a:headEnd type="none" w="med" len="med"/>
+                      <a:tailEnd type="none" w="med" len="med"/>
+                    </a:lnT>
+                    <a:lnB w="12700" cap="flat" cmpd="sng" algn="ctr">
+                      <a:solidFill>
+                        <a:schemeClr val="tx1"/>
+                      </a:solidFill>
+                      <a:prstDash val="solid"/>
+                      <a:round/>
+                      <a:headEnd type="none" w="med" len="med"/>
+                      <a:tailEnd type="none" w="med" len="med"/>
+                    </a:lnB>
+                    <a:lnTlToBr w="12700" cmpd="sng">
+                      <a:noFill/>
+                      <a:prstDash val="solid"/>
+                    </a:lnTlToBr>
+                    <a:lnBlToTr w="12700" cmpd="sng">
+                      <a:noFill/>
+                      <a:prstDash val="solid"/>
+                    </a:lnBlToTr>
+                    <a:solidFill>
+                      <a:schemeClr val="accent2">
+                        <a:lumMod val="75000"/>
+                      </a:schemeClr>
+                    </a:solidFill>
+                  </a:tcPr>
+                </a:tc>
+                <a:tc>
+                  <a:txBody>
+                    <a:bodyPr/>
+                    <a:lstStyle/>
+                    <a:p>
+                      <a:pPr rtl="1"/>
+                      <a:r>
+                        <a:rPr lang="en-US" dirty="0"/>
+                        <a:t>Device 2 Id</a:t>
+                      </a:r>
+                      <a:endParaRPr lang="he-IL" dirty="0"/>
+                    </a:p>
+                  </a:txBody>
+                  <a:tcPr>
+                    <a:lnL w="12700" cap="flat" cmpd="sng" algn="ctr">
+                      <a:solidFill>
+                        <a:schemeClr val="tx1"/>
+                      </a:solidFill>
+                      <a:prstDash val="solid"/>
+                      <a:round/>
+                      <a:headEnd type="none" w="med" len="med"/>
+                      <a:tailEnd type="none" w="med" len="med"/>
+                    </a:lnL>
+                    <a:lnR w="12700" cap="flat" cmpd="sng" algn="ctr">
+                      <a:solidFill>
+                        <a:schemeClr val="tx1"/>
+                      </a:solidFill>
+                      <a:prstDash val="solid"/>
+                      <a:round/>
+                      <a:headEnd type="none" w="med" len="med"/>
+                      <a:tailEnd type="none" w="med" len="med"/>
+                    </a:lnR>
+                    <a:lnT w="12700" cap="flat" cmpd="sng" algn="ctr">
+                      <a:solidFill>
+                        <a:schemeClr val="tx1"/>
+                      </a:solidFill>
+                      <a:prstDash val="solid"/>
+                      <a:round/>
+                      <a:headEnd type="none" w="med" len="med"/>
+                      <a:tailEnd type="none" w="med" len="med"/>
+                    </a:lnT>
+                    <a:lnB w="12700" cap="flat" cmpd="sng" algn="ctr">
+                      <a:solidFill>
+                        <a:schemeClr val="tx1"/>
+                      </a:solidFill>
+                      <a:prstDash val="solid"/>
+                      <a:round/>
+                      <a:headEnd type="none" w="med" len="med"/>
+                      <a:tailEnd type="none" w="med" len="med"/>
+                    </a:lnB>
+                    <a:lnTlToBr w="12700" cmpd="sng">
+                      <a:noFill/>
+                      <a:prstDash val="solid"/>
+                    </a:lnTlToBr>
+                    <a:lnBlToTr w="12700" cmpd="sng">
+                      <a:noFill/>
+                      <a:prstDash val="solid"/>
+                    </a:lnBlToTr>
+                    <a:solidFill>
+                      <a:schemeClr val="accent2">
+                        <a:lumMod val="75000"/>
+                      </a:schemeClr>
+                    </a:solidFill>
+                  </a:tcPr>
+                </a:tc>
+                <a:tc>
+                  <a:txBody>
+                    <a:bodyPr/>
+                    <a:lstStyle/>
+                    <a:p>
+                      <a:pPr rtl="1"/>
+                      <a:r>
+                        <a:rPr lang="en-US" dirty="0"/>
+                        <a:t>Root ID</a:t>
+                      </a:r>
+                      <a:endParaRPr lang="he-IL" dirty="0"/>
+                    </a:p>
+                  </a:txBody>
+                  <a:tcPr>
+                    <a:lnL w="12700" cap="flat" cmpd="sng" algn="ctr">
+                      <a:solidFill>
+                        <a:schemeClr val="tx1"/>
+                      </a:solidFill>
+                      <a:prstDash val="solid"/>
+                      <a:round/>
+                      <a:headEnd type="none" w="med" len="med"/>
+                      <a:tailEnd type="none" w="med" len="med"/>
+                    </a:lnL>
+                    <a:lnR w="12700" cap="flat" cmpd="sng" algn="ctr">
+                      <a:solidFill>
+                        <a:schemeClr val="tx1"/>
+                      </a:solidFill>
+                      <a:prstDash val="solid"/>
+                      <a:round/>
+                      <a:headEnd type="none" w="med" len="med"/>
+                      <a:tailEnd type="none" w="med" len="med"/>
+                    </a:lnR>
+                    <a:lnT w="12700" cap="flat" cmpd="sng" algn="ctr">
+                      <a:solidFill>
+                        <a:schemeClr val="tx1"/>
+                      </a:solidFill>
+                      <a:prstDash val="solid"/>
+                      <a:round/>
+                      <a:headEnd type="none" w="med" len="med"/>
+                      <a:tailEnd type="none" w="med" len="med"/>
+                    </a:lnT>
+                    <a:lnB w="12700" cap="flat" cmpd="sng" algn="ctr">
+                      <a:solidFill>
+                        <a:schemeClr val="tx1"/>
+                      </a:solidFill>
+                      <a:prstDash val="solid"/>
+                      <a:round/>
+                      <a:headEnd type="none" w="med" len="med"/>
+                      <a:tailEnd type="none" w="med" len="med"/>
+                    </a:lnB>
+                    <a:lnTlToBr w="12700" cmpd="sng">
+                      <a:noFill/>
+                      <a:prstDash val="solid"/>
+                    </a:lnTlToBr>
+                    <a:lnBlToTr w="12700" cmpd="sng">
+                      <a:noFill/>
+                      <a:prstDash val="solid"/>
+                    </a:lnBlToTr>
+                    <a:solidFill>
+                      <a:schemeClr val="accent2">
+                        <a:lumMod val="75000"/>
+                      </a:schemeClr>
+                    </a:solidFill>
+                  </a:tcPr>
+                </a:tc>
+                <a:tc>
+                  <a:txBody>
+                    <a:bodyPr/>
+                    <a:lstStyle/>
+                    <a:p>
+                      <a:pPr algn="ctr" rtl="1"/>
+                      <a:r>
+                        <a:rPr lang="en-US" dirty="0"/>
+                        <a:t>TYPE</a:t>
+                      </a:r>
+                      <a:br>
+                        <a:rPr lang="en-US" dirty="0"/>
+                      </a:br>
+                      <a:r>
+                        <a:rPr lang="en-US" dirty="0"/>
+                        <a:t>4bits</a:t>
+                      </a:r>
+                      <a:endParaRPr lang="he-IL" dirty="0"/>
+                    </a:p>
+                  </a:txBody>
+                  <a:tcPr>
+                    <a:lnL w="12700" cap="flat" cmpd="sng" algn="ctr">
+                      <a:solidFill>
+                        <a:schemeClr val="tx1"/>
+                      </a:solidFill>
+                      <a:prstDash val="solid"/>
+                      <a:round/>
+                      <a:headEnd type="none" w="med" len="med"/>
+                      <a:tailEnd type="none" w="med" len="med"/>
+                    </a:lnL>
+                    <a:lnR w="12700" cap="flat" cmpd="sng" algn="ctr">
+                      <a:solidFill>
+                        <a:schemeClr val="tx1"/>
+                      </a:solidFill>
+                      <a:prstDash val="solid"/>
+                      <a:round/>
+                      <a:headEnd type="none" w="med" len="med"/>
+                      <a:tailEnd type="none" w="med" len="med"/>
+                    </a:lnR>
+                    <a:lnT w="12700" cap="flat" cmpd="sng" algn="ctr">
+                      <a:solidFill>
+                        <a:schemeClr val="tx1"/>
+                      </a:solidFill>
+                      <a:prstDash val="solid"/>
+                      <a:round/>
+                      <a:headEnd type="none" w="med" len="med"/>
+                      <a:tailEnd type="none" w="med" len="med"/>
+                    </a:lnT>
+                    <a:lnB w="12700" cap="flat" cmpd="sng" algn="ctr">
+                      <a:solidFill>
+                        <a:schemeClr val="tx1"/>
+                      </a:solidFill>
+                      <a:prstDash val="solid"/>
+                      <a:round/>
+                      <a:headEnd type="none" w="med" len="med"/>
+                      <a:tailEnd type="none" w="med" len="med"/>
+                    </a:lnB>
+                  </a:tcPr>
+                </a:tc>
+                <a:extLst>
+                  <a:ext uri="{0D108BD9-81ED-4DB2-BD59-A6C34878D82A}">
+                    <a16:rowId xmlns:a16="http://schemas.microsoft.com/office/drawing/2014/main" val="2126829040"/>
+                  </a:ext>
+                </a:extLst>
+              </a:tr>
+              <a:tr h="989305">
+                <a:tc>
+                  <a:txBody>
+                    <a:bodyPr/>
+                    <a:lstStyle/>
+                    <a:p>
+                      <a:pPr algn="ctr" rtl="1"/>
+                      <a:r>
+                        <a:rPr lang="en-US" dirty="0"/>
+                        <a:t>Value:</a:t>
+                      </a:r>
+                      <a:br>
+                        <a:rPr lang="en-US" dirty="0"/>
+                      </a:br>
+                      <a:r>
+                        <a:rPr lang="en-US" dirty="0"/>
+                        <a:t>CRC8</a:t>
+                      </a:r>
+                      <a:endParaRPr lang="he-IL" dirty="0"/>
+                    </a:p>
+                  </a:txBody>
+                  <a:tcPr>
+                    <a:lnL w="12700" cap="flat" cmpd="sng" algn="ctr">
+                      <a:solidFill>
+                        <a:schemeClr val="tx1"/>
+                      </a:solidFill>
+                      <a:prstDash val="solid"/>
+                      <a:round/>
+                      <a:headEnd type="none" w="med" len="med"/>
+                      <a:tailEnd type="none" w="med" len="med"/>
+                    </a:lnL>
+                    <a:lnR w="12700" cap="flat" cmpd="sng" algn="ctr">
+                      <a:solidFill>
+                        <a:schemeClr val="tx1"/>
+                      </a:solidFill>
+                      <a:prstDash val="solid"/>
+                      <a:round/>
+                      <a:headEnd type="none" w="med" len="med"/>
+                      <a:tailEnd type="none" w="med" len="med"/>
+                    </a:lnR>
+                    <a:lnT w="12700" cap="flat" cmpd="sng" algn="ctr">
+                      <a:solidFill>
+                        <a:schemeClr val="tx1"/>
+                      </a:solidFill>
+                      <a:prstDash val="solid"/>
+                      <a:round/>
+                      <a:headEnd type="none" w="med" len="med"/>
+                      <a:tailEnd type="none" w="med" len="med"/>
+                    </a:lnT>
+                    <a:lnB w="12700" cap="flat" cmpd="sng" algn="ctr">
+                      <a:solidFill>
+                        <a:schemeClr val="tx1"/>
+                      </a:solidFill>
+                      <a:prstDash val="solid"/>
+                      <a:round/>
+                      <a:headEnd type="none" w="med" len="med"/>
+                      <a:tailEnd type="none" w="med" len="med"/>
+                    </a:lnB>
+                    <a:solidFill>
+                      <a:srgbClr val="FF0000"/>
+                    </a:solidFill>
+                  </a:tcPr>
+                </a:tc>
+                <a:tc>
+                  <a:txBody>
+                    <a:bodyPr/>
+                    <a:lstStyle/>
+                    <a:p>
+                      <a:pPr algn="ctr" rtl="1"/>
+                      <a:r>
+                        <a:rPr lang="en-US" dirty="0"/>
+                        <a:t>Value:</a:t>
+                      </a:r>
+                      <a:br>
+                        <a:rPr lang="en-US" dirty="0"/>
+                      </a:br>
+                      <a:r>
+                        <a:rPr lang="en-US" dirty="0"/>
+                        <a:t>8bits</a:t>
+                      </a:r>
+                      <a:endParaRPr lang="he-IL" dirty="0"/>
+                    </a:p>
+                  </a:txBody>
+                  <a:tcPr>
+                    <a:lnL w="12700" cap="flat" cmpd="sng" algn="ctr">
+                      <a:solidFill>
+                        <a:schemeClr val="tx1"/>
+                      </a:solidFill>
+                      <a:prstDash val="solid"/>
+                      <a:round/>
+                      <a:headEnd type="none" w="med" len="med"/>
+                      <a:tailEnd type="none" w="med" len="med"/>
+                    </a:lnL>
+                    <a:lnR w="12700" cap="flat" cmpd="sng" algn="ctr">
+                      <a:solidFill>
+                        <a:schemeClr val="tx1"/>
+                      </a:solidFill>
+                      <a:prstDash val="solid"/>
+                      <a:round/>
+                      <a:headEnd type="none" w="med" len="med"/>
+                      <a:tailEnd type="none" w="med" len="med"/>
+                    </a:lnR>
+                    <a:lnT w="12700" cap="flat" cmpd="sng" algn="ctr">
+                      <a:solidFill>
+                        <a:schemeClr val="tx1"/>
+                      </a:solidFill>
+                      <a:prstDash val="solid"/>
+                      <a:round/>
+                      <a:headEnd type="none" w="med" len="med"/>
+                      <a:tailEnd type="none" w="med" len="med"/>
+                    </a:lnT>
+                    <a:lnB w="12700" cap="flat" cmpd="sng" algn="ctr">
+                      <a:solidFill>
+                        <a:schemeClr val="tx1"/>
+                      </a:solidFill>
+                      <a:prstDash val="solid"/>
+                      <a:round/>
+                      <a:headEnd type="none" w="med" len="med"/>
+                      <a:tailEnd type="none" w="med" len="med"/>
+                    </a:lnB>
+                    <a:lnTlToBr w="12700" cmpd="sng">
+                      <a:noFill/>
+                      <a:prstDash val="solid"/>
+                    </a:lnTlToBr>
+                    <a:lnBlToTr w="12700" cmpd="sng">
+                      <a:noFill/>
+                      <a:prstDash val="solid"/>
+                    </a:lnBlToTr>
+                    <a:solidFill>
+                      <a:schemeClr val="accent2">
+                        <a:lumMod val="60000"/>
+                        <a:lumOff val="40000"/>
+                      </a:schemeClr>
+                    </a:solidFill>
+                  </a:tcPr>
+                </a:tc>
+                <a:tc>
+                  <a:txBody>
+                    <a:bodyPr/>
+                    <a:lstStyle/>
+                    <a:p>
+                      <a:pPr algn="ctr" rtl="1"/>
+                      <a:r>
+                        <a:rPr lang="en-US" dirty="0"/>
+                        <a:t>Value:</a:t>
+                      </a:r>
+                      <a:br>
+                        <a:rPr lang="en-US" dirty="0"/>
+                      </a:br>
+                      <a:r>
+                        <a:rPr lang="en-US" dirty="0"/>
+                        <a:t>8bits</a:t>
+                      </a:r>
+                      <a:endParaRPr lang="he-IL" dirty="0"/>
+                    </a:p>
+                  </a:txBody>
+                  <a:tcPr>
+                    <a:lnL w="12700" cap="flat" cmpd="sng" algn="ctr">
+                      <a:solidFill>
+                        <a:schemeClr val="tx1"/>
+                      </a:solidFill>
+                      <a:prstDash val="solid"/>
+                      <a:round/>
+                      <a:headEnd type="none" w="med" len="med"/>
+                      <a:tailEnd type="none" w="med" len="med"/>
+                    </a:lnL>
+                    <a:lnR w="12700" cap="flat" cmpd="sng" algn="ctr">
+                      <a:solidFill>
+                        <a:schemeClr val="tx1"/>
+                      </a:solidFill>
+                      <a:prstDash val="solid"/>
+                      <a:round/>
+                      <a:headEnd type="none" w="med" len="med"/>
+                      <a:tailEnd type="none" w="med" len="med"/>
+                    </a:lnR>
+                    <a:lnT w="12700" cap="flat" cmpd="sng" algn="ctr">
+                      <a:solidFill>
+                        <a:schemeClr val="tx1"/>
+                      </a:solidFill>
+                      <a:prstDash val="solid"/>
+                      <a:round/>
+                      <a:headEnd type="none" w="med" len="med"/>
+                      <a:tailEnd type="none" w="med" len="med"/>
+                    </a:lnT>
+                    <a:lnB w="12700" cap="flat" cmpd="sng" algn="ctr">
+                      <a:solidFill>
+                        <a:schemeClr val="tx1"/>
+                      </a:solidFill>
+                      <a:prstDash val="solid"/>
+                      <a:round/>
+                      <a:headEnd type="none" w="med" len="med"/>
+                      <a:tailEnd type="none" w="med" len="med"/>
+                    </a:lnB>
+                    <a:lnTlToBr w="12700" cmpd="sng">
+                      <a:noFill/>
+                      <a:prstDash val="solid"/>
+                    </a:lnTlToBr>
+                    <a:lnBlToTr w="12700" cmpd="sng">
+                      <a:noFill/>
+                      <a:prstDash val="solid"/>
+                    </a:lnBlToTr>
+                    <a:solidFill>
+                      <a:schemeClr val="accent2">
+                        <a:lumMod val="60000"/>
+                        <a:lumOff val="40000"/>
+                      </a:schemeClr>
+                    </a:solidFill>
+                  </a:tcPr>
+                </a:tc>
+                <a:tc>
+                  <a:txBody>
+                    <a:bodyPr/>
+                    <a:lstStyle/>
+                    <a:p>
+                      <a:pPr algn="ctr" rtl="1"/>
+                      <a:r>
+                        <a:rPr lang="en-US" dirty="0"/>
+                        <a:t>Value:</a:t>
+                      </a:r>
+                      <a:br>
+                        <a:rPr lang="en-US" dirty="0"/>
+                      </a:br>
+                      <a:r>
+                        <a:rPr lang="en-US" dirty="0"/>
+                        <a:t>8bits</a:t>
+                      </a:r>
+                      <a:endParaRPr lang="he-IL" dirty="0"/>
+                    </a:p>
+                  </a:txBody>
+                  <a:tcPr>
+                    <a:lnL w="12700" cap="flat" cmpd="sng" algn="ctr">
+                      <a:solidFill>
+                        <a:schemeClr val="tx1"/>
+                      </a:solidFill>
+                      <a:prstDash val="solid"/>
+                      <a:round/>
+                      <a:headEnd type="none" w="med" len="med"/>
+                      <a:tailEnd type="none" w="med" len="med"/>
+                    </a:lnL>
+                    <a:lnR w="12700" cap="flat" cmpd="sng" algn="ctr">
+                      <a:solidFill>
+                        <a:schemeClr val="tx1"/>
+                      </a:solidFill>
+                      <a:prstDash val="solid"/>
+                      <a:round/>
+                      <a:headEnd type="none" w="med" len="med"/>
+                      <a:tailEnd type="none" w="med" len="med"/>
+                    </a:lnR>
+                    <a:lnT w="12700" cap="flat" cmpd="sng" algn="ctr">
+                      <a:solidFill>
+                        <a:schemeClr val="tx1"/>
+                      </a:solidFill>
+                      <a:prstDash val="solid"/>
+                      <a:round/>
+                      <a:headEnd type="none" w="med" len="med"/>
+                      <a:tailEnd type="none" w="med" len="med"/>
+                    </a:lnT>
+                    <a:lnB w="12700" cap="flat" cmpd="sng" algn="ctr">
+                      <a:solidFill>
+                        <a:schemeClr val="tx1"/>
+                      </a:solidFill>
+                      <a:prstDash val="solid"/>
+                      <a:round/>
+                      <a:headEnd type="none" w="med" len="med"/>
+                      <a:tailEnd type="none" w="med" len="med"/>
+                    </a:lnB>
+                    <a:lnTlToBr w="12700" cmpd="sng">
+                      <a:noFill/>
+                      <a:prstDash val="solid"/>
+                    </a:lnTlToBr>
+                    <a:lnBlToTr w="12700" cmpd="sng">
+                      <a:noFill/>
+                      <a:prstDash val="solid"/>
+                    </a:lnBlToTr>
+                    <a:solidFill>
+                      <a:schemeClr val="accent2">
+                        <a:lumMod val="60000"/>
+                        <a:lumOff val="40000"/>
+                      </a:schemeClr>
+                    </a:solidFill>
+                  </a:tcPr>
+                </a:tc>
+                <a:tc>
+                  <a:txBody>
+                    <a:bodyPr/>
+                    <a:lstStyle/>
+                    <a:p>
+                      <a:pPr algn="ctr" rtl="1"/>
+                      <a:r>
+                        <a:rPr lang="en-US" dirty="0"/>
+                        <a:t>Value:</a:t>
+                      </a:r>
+                      <a:br>
+                        <a:rPr lang="en-US" dirty="0"/>
+                      </a:br>
+                      <a:r>
+                        <a:rPr lang="en-US" dirty="0"/>
+                        <a:t>8bits</a:t>
+                      </a:r>
+                      <a:endParaRPr lang="he-IL" dirty="0"/>
+                    </a:p>
+                  </a:txBody>
+                  <a:tcPr>
+                    <a:lnL w="12700" cap="flat" cmpd="sng" algn="ctr">
+                      <a:solidFill>
+                        <a:schemeClr val="tx1"/>
+                      </a:solidFill>
+                      <a:prstDash val="solid"/>
+                      <a:round/>
+                      <a:headEnd type="none" w="med" len="med"/>
+                      <a:tailEnd type="none" w="med" len="med"/>
+                    </a:lnL>
+                    <a:lnR w="12700" cap="flat" cmpd="sng" algn="ctr">
+                      <a:solidFill>
+                        <a:schemeClr val="tx1"/>
+                      </a:solidFill>
+                      <a:prstDash val="solid"/>
+                      <a:round/>
+                      <a:headEnd type="none" w="med" len="med"/>
+                      <a:tailEnd type="none" w="med" len="med"/>
+                    </a:lnR>
+                    <a:lnT w="12700" cap="flat" cmpd="sng" algn="ctr">
+                      <a:solidFill>
+                        <a:schemeClr val="tx1"/>
+                      </a:solidFill>
+                      <a:prstDash val="solid"/>
+                      <a:round/>
+                      <a:headEnd type="none" w="med" len="med"/>
+                      <a:tailEnd type="none" w="med" len="med"/>
+                    </a:lnT>
+                    <a:lnB w="12700" cap="flat" cmpd="sng" algn="ctr">
+                      <a:solidFill>
+                        <a:schemeClr val="tx1"/>
+                      </a:solidFill>
+                      <a:prstDash val="solid"/>
+                      <a:round/>
+                      <a:headEnd type="none" w="med" len="med"/>
+                      <a:tailEnd type="none" w="med" len="med"/>
+                    </a:lnB>
+                    <a:lnTlToBr w="12700" cmpd="sng">
+                      <a:noFill/>
+                      <a:prstDash val="solid"/>
+                    </a:lnTlToBr>
+                    <a:lnBlToTr w="12700" cmpd="sng">
+                      <a:noFill/>
+                      <a:prstDash val="solid"/>
+                    </a:lnBlToTr>
+                    <a:solidFill>
+                      <a:schemeClr val="accent2">
+                        <a:lumMod val="60000"/>
+                        <a:lumOff val="40000"/>
+                      </a:schemeClr>
+                    </a:solidFill>
+                  </a:tcPr>
+                </a:tc>
+                <a:tc>
+                  <a:txBody>
+                    <a:bodyPr/>
+                    <a:lstStyle/>
+                    <a:p>
+                      <a:pPr algn="ctr" rtl="1"/>
+                      <a:r>
+                        <a:rPr lang="en-US" dirty="0"/>
+                        <a:t>Value:</a:t>
+                      </a:r>
+                      <a:br>
+                        <a:rPr lang="en-US" dirty="0"/>
+                      </a:br>
+                      <a:r>
+                        <a:rPr lang="en-US" dirty="0"/>
+                        <a:t>8bits</a:t>
+                      </a:r>
+                      <a:endParaRPr lang="he-IL" dirty="0"/>
+                    </a:p>
+                  </a:txBody>
+                  <a:tcPr>
+                    <a:lnL w="12700" cap="flat" cmpd="sng" algn="ctr">
+                      <a:solidFill>
+                        <a:schemeClr val="tx1"/>
+                      </a:solidFill>
+                      <a:prstDash val="solid"/>
+                      <a:round/>
+                      <a:headEnd type="none" w="med" len="med"/>
+                      <a:tailEnd type="none" w="med" len="med"/>
+                    </a:lnL>
+                    <a:lnR w="12700" cap="flat" cmpd="sng" algn="ctr">
+                      <a:solidFill>
+                        <a:schemeClr val="tx1"/>
+                      </a:solidFill>
+                      <a:prstDash val="solid"/>
+                      <a:round/>
+                      <a:headEnd type="none" w="med" len="med"/>
+                      <a:tailEnd type="none" w="med" len="med"/>
+                    </a:lnR>
+                    <a:lnT w="12700" cap="flat" cmpd="sng" algn="ctr">
+                      <a:solidFill>
+                        <a:schemeClr val="tx1"/>
+                      </a:solidFill>
+                      <a:prstDash val="solid"/>
+                      <a:round/>
+                      <a:headEnd type="none" w="med" len="med"/>
+                      <a:tailEnd type="none" w="med" len="med"/>
+                    </a:lnT>
+                    <a:lnB w="12700" cap="flat" cmpd="sng" algn="ctr">
+                      <a:solidFill>
+                        <a:schemeClr val="tx1"/>
+                      </a:solidFill>
+                      <a:prstDash val="solid"/>
+                      <a:round/>
+                      <a:headEnd type="none" w="med" len="med"/>
+                      <a:tailEnd type="none" w="med" len="med"/>
+                    </a:lnB>
+                    <a:lnTlToBr w="12700" cmpd="sng">
+                      <a:noFill/>
+                      <a:prstDash val="solid"/>
+                    </a:lnTlToBr>
+                    <a:lnBlToTr w="12700" cmpd="sng">
+                      <a:noFill/>
+                      <a:prstDash val="solid"/>
+                    </a:lnBlToTr>
+                    <a:solidFill>
+                      <a:schemeClr val="accent2">
+                        <a:lumMod val="60000"/>
+                        <a:lumOff val="40000"/>
+                      </a:schemeClr>
+                    </a:solidFill>
+                  </a:tcPr>
+                </a:tc>
+                <a:tc>
+                  <a:txBody>
+                    <a:bodyPr/>
+                    <a:lstStyle/>
+                    <a:p>
+                      <a:pPr algn="ctr" rtl="1"/>
+                      <a:r>
+                        <a:rPr lang="en-US" dirty="0"/>
+                        <a:t>Value:</a:t>
+                      </a:r>
+                      <a:br>
+                        <a:rPr lang="en-US" dirty="0"/>
+                      </a:br>
+                      <a:r>
+                        <a:rPr lang="en-US" dirty="0"/>
+                        <a:t>8bits</a:t>
+                      </a:r>
+                      <a:endParaRPr lang="he-IL" dirty="0"/>
+                    </a:p>
+                  </a:txBody>
+                  <a:tcPr>
+                    <a:lnL w="12700" cap="flat" cmpd="sng" algn="ctr">
+                      <a:solidFill>
+                        <a:schemeClr val="tx1"/>
+                      </a:solidFill>
+                      <a:prstDash val="solid"/>
+                      <a:round/>
+                      <a:headEnd type="none" w="med" len="med"/>
+                      <a:tailEnd type="none" w="med" len="med"/>
+                    </a:lnL>
+                    <a:lnR w="12700" cap="flat" cmpd="sng" algn="ctr">
+                      <a:solidFill>
+                        <a:schemeClr val="tx1"/>
+                      </a:solidFill>
+                      <a:prstDash val="solid"/>
+                      <a:round/>
+                      <a:headEnd type="none" w="med" len="med"/>
+                      <a:tailEnd type="none" w="med" len="med"/>
+                    </a:lnR>
+                    <a:lnT w="12700" cap="flat" cmpd="sng" algn="ctr">
+                      <a:solidFill>
+                        <a:schemeClr val="tx1"/>
+                      </a:solidFill>
+                      <a:prstDash val="solid"/>
+                      <a:round/>
+                      <a:headEnd type="none" w="med" len="med"/>
+                      <a:tailEnd type="none" w="med" len="med"/>
+                    </a:lnT>
+                    <a:lnB w="12700" cap="flat" cmpd="sng" algn="ctr">
+                      <a:solidFill>
+                        <a:schemeClr val="tx1"/>
+                      </a:solidFill>
+                      <a:prstDash val="solid"/>
+                      <a:round/>
+                      <a:headEnd type="none" w="med" len="med"/>
+                      <a:tailEnd type="none" w="med" len="med"/>
+                    </a:lnB>
+                    <a:lnTlToBr w="12700" cmpd="sng">
+                      <a:noFill/>
+                      <a:prstDash val="solid"/>
+                    </a:lnTlToBr>
+                    <a:lnBlToTr w="12700" cmpd="sng">
+                      <a:noFill/>
+                      <a:prstDash val="solid"/>
+                    </a:lnBlToTr>
+                    <a:solidFill>
+                      <a:schemeClr val="accent2">
+                        <a:lumMod val="60000"/>
+                        <a:lumOff val="40000"/>
+                      </a:schemeClr>
+                    </a:solidFill>
+                  </a:tcPr>
+                </a:tc>
+                <a:tc>
+                  <a:txBody>
+                    <a:bodyPr/>
+                    <a:lstStyle/>
+                    <a:p>
+                      <a:pPr algn="ctr" rtl="1"/>
+                      <a:r>
+                        <a:rPr lang="en-US" dirty="0"/>
+                        <a:t>Value:</a:t>
+                      </a:r>
+                      <a:br>
+                        <a:rPr lang="en-US" dirty="0"/>
+                      </a:br>
+                      <a:r>
+                        <a:rPr lang="en-US" dirty="0"/>
+                        <a:t>0x0F</a:t>
+                      </a:r>
+                      <a:endParaRPr lang="he-IL" dirty="0"/>
+                    </a:p>
+                  </a:txBody>
+                  <a:tcPr>
+                    <a:lnL w="12700" cap="flat" cmpd="sng" algn="ctr">
+                      <a:solidFill>
+                        <a:schemeClr val="tx1"/>
+                      </a:solidFill>
+                      <a:prstDash val="solid"/>
+                      <a:round/>
+                      <a:headEnd type="none" w="med" len="med"/>
+                      <a:tailEnd type="none" w="med" len="med"/>
+                    </a:lnL>
+                    <a:lnR w="12700" cap="flat" cmpd="sng" algn="ctr">
+                      <a:solidFill>
+                        <a:schemeClr val="tx1"/>
+                      </a:solidFill>
+                      <a:prstDash val="solid"/>
+                      <a:round/>
+                      <a:headEnd type="none" w="med" len="med"/>
+                      <a:tailEnd type="none" w="med" len="med"/>
+                    </a:lnR>
+                    <a:lnT w="12700" cap="flat" cmpd="sng" algn="ctr">
+                      <a:solidFill>
+                        <a:schemeClr val="tx1"/>
+                      </a:solidFill>
+                      <a:prstDash val="solid"/>
+                      <a:round/>
+                      <a:headEnd type="none" w="med" len="med"/>
+                      <a:tailEnd type="none" w="med" len="med"/>
+                    </a:lnT>
+                    <a:lnB w="12700" cap="flat" cmpd="sng" algn="ctr">
+                      <a:solidFill>
+                        <a:schemeClr val="tx1"/>
+                      </a:solidFill>
+                      <a:prstDash val="solid"/>
+                      <a:round/>
+                      <a:headEnd type="none" w="med" len="med"/>
+                      <a:tailEnd type="none" w="med" len="med"/>
+                    </a:lnB>
+                    <a:solidFill>
+                      <a:srgbClr val="00B0F0"/>
+                    </a:solidFill>
+                  </a:tcPr>
+                </a:tc>
+                <a:extLst>
+                  <a:ext uri="{0D108BD9-81ED-4DB2-BD59-A6C34878D82A}">
+                    <a16:rowId xmlns:a16="http://schemas.microsoft.com/office/drawing/2014/main" val="3329294810"/>
+                  </a:ext>
+                </a:extLst>
+              </a:tr>
+            </a:tbl>
+          </a:graphicData>
+        </a:graphic>
+      </p:graphicFrame>
+      <p:sp>
+        <p:nvSpPr>
+          <p:cNvPr id="8" name="TextBox 7">
+            <a:extLst>
+              <a:ext uri="{FF2B5EF4-FFF2-40B4-BE49-F238E27FC236}">
+                <a16:creationId xmlns:a16="http://schemas.microsoft.com/office/drawing/2014/main" id="{B16C646B-842F-F1A1-33AC-33E815BF5515}"/>
+              </a:ext>
+            </a:extLst>
+          </p:cNvPr>
+          <p:cNvSpPr txBox="1"/>
+          <p:nvPr/>
+        </p:nvSpPr>
+        <p:spPr>
+          <a:xfrm>
+            <a:off x="1236400" y="2119815"/>
+            <a:ext cx="9719199" cy="369332"/>
+          </a:xfrm>
+          <a:prstGeom prst="rect">
+            <a:avLst/>
+          </a:prstGeom>
+          <a:noFill/>
+        </p:spPr>
+        <p:txBody>
+          <a:bodyPr wrap="square" rtlCol="1">
+            <a:spAutoFit/>
+          </a:bodyPr>
+          <a:lstStyle/>
+          <a:p>
+            <a:pPr algn="ctr"/>
+            <a:r>
+              <a:rPr lang="en-US" b="1" dirty="0"/>
+              <a:t>Reverse Path and Tree Graph Synthesis Structure</a:t>
+            </a:r>
+            <a:endParaRPr lang="he-IL" b="1" dirty="0"/>
+          </a:p>
+        </p:txBody>
+      </p:sp>
+    </p:spTree>
+    <p:extLst>
+      <p:ext uri="{BB962C8B-B14F-4D97-AF65-F5344CB8AC3E}">
+        <p14:creationId xmlns:p14="http://schemas.microsoft.com/office/powerpoint/2010/main" val="3398879726"/>
+      </p:ext>
+    </p:extLst>
+  </p:cSld>
+  <p:clrMapOvr>
+    <a:masterClrMapping/>
+  </p:clrMapOvr>
+</p:sld>
+</file>
+
+<file path=ppt/slides/slide4.xml><?xml version="1.0" encoding="utf-8"?>
+<p:sld xmlns:a="http://schemas.openxmlformats.org/drawingml/2006/main" xmlns:r="http://schemas.openxmlformats.org/officeDocument/2006/relationships" xmlns:p="http://schemas.openxmlformats.org/presentationml/2006/main">
+  <p:cSld>
+    <p:spTree>
+      <p:nvGrpSpPr>
+        <p:cNvPr id="1" name="">
+          <a:extLst>
+            <a:ext uri="{FF2B5EF4-FFF2-40B4-BE49-F238E27FC236}">
+              <a16:creationId xmlns:a16="http://schemas.microsoft.com/office/drawing/2014/main" id="{5C3551B8-E8B9-1A93-49F7-2DC02C8F6C03}"/>
+            </a:ext>
+          </a:extLst>
+        </p:cNvPr>
+        <p:cNvGrpSpPr/>
+        <p:nvPr/>
+      </p:nvGrpSpPr>
+      <p:grpSpPr>
+        <a:xfrm>
+          <a:off x="0" y="0"/>
+          <a:ext cx="0" cy="0"/>
+          <a:chOff x="0" y="0"/>
+          <a:chExt cx="0" cy="0"/>
+        </a:xfrm>
+      </p:grpSpPr>
+      <p:graphicFrame>
+        <p:nvGraphicFramePr>
+          <p:cNvPr id="4" name="Table 3">
+            <a:extLst>
+              <a:ext uri="{FF2B5EF4-FFF2-40B4-BE49-F238E27FC236}">
+                <a16:creationId xmlns:a16="http://schemas.microsoft.com/office/drawing/2014/main" id="{B18BB9E2-DB36-C419-3B44-6D95010A1F5A}"/>
+              </a:ext>
+            </a:extLst>
+          </p:cNvPr>
+          <p:cNvGraphicFramePr>
+            <a:graphicFrameLocks noGrp="1"/>
+          </p:cNvGraphicFramePr>
+          <p:nvPr>
+            <p:extLst>
+              <p:ext uri="{D42A27DB-BD31-4B8C-83A1-F6EECF244321}">
+                <p14:modId xmlns:p14="http://schemas.microsoft.com/office/powerpoint/2010/main" val="2945240541"/>
+              </p:ext>
+            </p:extLst>
+          </p:nvPr>
+        </p:nvGraphicFramePr>
+        <p:xfrm>
+          <a:off x="715991" y="2652317"/>
+          <a:ext cx="10265434" cy="1903705"/>
+        </p:xfrm>
+        <a:graphic>
+          <a:graphicData uri="http://schemas.openxmlformats.org/drawingml/2006/table">
+            <a:tbl>
+              <a:tblPr rtl="1" firstRow="1" bandRow="1">
+                <a:tableStyleId>{5C22544A-7EE6-4342-B048-85BDC9FD1C3A}</a:tableStyleId>
+              </a:tblPr>
+              <a:tblGrid>
+                <a:gridCol w="1538749">
+                  <a:extLst>
+                    <a:ext uri="{9D8B030D-6E8A-4147-A177-3AD203B41FA5}">
+                      <a16:colId xmlns:a16="http://schemas.microsoft.com/office/drawing/2014/main" val="955862198"/>
+                    </a:ext>
+                  </a:extLst>
+                </a:gridCol>
+                <a:gridCol w="1178571">
+                  <a:extLst>
+                    <a:ext uri="{9D8B030D-6E8A-4147-A177-3AD203B41FA5}">
+                      <a16:colId xmlns:a16="http://schemas.microsoft.com/office/drawing/2014/main" val="1687635297"/>
+                    </a:ext>
+                  </a:extLst>
+                </a:gridCol>
+                <a:gridCol w="924020">
+                  <a:extLst>
+                    <a:ext uri="{9D8B030D-6E8A-4147-A177-3AD203B41FA5}">
+                      <a16:colId xmlns:a16="http://schemas.microsoft.com/office/drawing/2014/main" val="2620613503"/>
+                    </a:ext>
+                  </a:extLst>
+                </a:gridCol>
+                <a:gridCol w="1051296">
+                  <a:extLst>
+                    <a:ext uri="{9D8B030D-6E8A-4147-A177-3AD203B41FA5}">
+                      <a16:colId xmlns:a16="http://schemas.microsoft.com/office/drawing/2014/main" val="1760604788"/>
+                    </a:ext>
+                  </a:extLst>
+                </a:gridCol>
+                <a:gridCol w="1051296">
+                  <a:extLst>
+                    <a:ext uri="{9D8B030D-6E8A-4147-A177-3AD203B41FA5}">
+                      <a16:colId xmlns:a16="http://schemas.microsoft.com/office/drawing/2014/main" val="1100616153"/>
+                    </a:ext>
+                  </a:extLst>
+                </a:gridCol>
+                <a:gridCol w="1051295">
+                  <a:extLst>
+                    <a:ext uri="{9D8B030D-6E8A-4147-A177-3AD203B41FA5}">
+                      <a16:colId xmlns:a16="http://schemas.microsoft.com/office/drawing/2014/main" val="1970551147"/>
+                    </a:ext>
+                  </a:extLst>
+                </a:gridCol>
+                <a:gridCol w="1051296">
+                  <a:extLst>
+                    <a:ext uri="{9D8B030D-6E8A-4147-A177-3AD203B41FA5}">
+                      <a16:colId xmlns:a16="http://schemas.microsoft.com/office/drawing/2014/main" val="2554382947"/>
+                    </a:ext>
+                  </a:extLst>
+                </a:gridCol>
+                <a:gridCol w="2418911">
+                  <a:extLst>
+                    <a:ext uri="{9D8B030D-6E8A-4147-A177-3AD203B41FA5}">
+                      <a16:colId xmlns:a16="http://schemas.microsoft.com/office/drawing/2014/main" val="1617877242"/>
+                    </a:ext>
+                  </a:extLst>
+                </a:gridCol>
+              </a:tblGrid>
+              <a:tr h="0">
+                <a:tc>
+                  <a:txBody>
+                    <a:bodyPr/>
+                    <a:lstStyle/>
+                    <a:p>
+                      <a:pPr algn="ctr" rtl="1"/>
+                      <a:r>
+                        <a:rPr lang="en-US" dirty="0"/>
+                        <a:t>8bits CRC8</a:t>
+                      </a:r>
+                      <a:endParaRPr lang="he-IL" dirty="0"/>
+                    </a:p>
+                  </a:txBody>
+                  <a:tcPr>
+                    <a:lnL w="12700" cap="flat" cmpd="sng" algn="ctr">
+                      <a:solidFill>
+                        <a:schemeClr val="tx1"/>
+                      </a:solidFill>
+                      <a:prstDash val="solid"/>
+                      <a:round/>
+                      <a:headEnd type="none" w="med" len="med"/>
+                      <a:tailEnd type="none" w="med" len="med"/>
+                    </a:lnL>
+                    <a:lnR w="12700" cap="flat" cmpd="sng" algn="ctr">
+                      <a:solidFill>
+                        <a:schemeClr val="tx1"/>
+                      </a:solidFill>
+                      <a:prstDash val="solid"/>
+                      <a:round/>
+                      <a:headEnd type="none" w="med" len="med"/>
+                      <a:tailEnd type="none" w="med" len="med"/>
+                    </a:lnR>
+                    <a:lnT w="12700" cap="flat" cmpd="sng" algn="ctr">
+                      <a:solidFill>
+                        <a:schemeClr val="tx1"/>
+                      </a:solidFill>
+                      <a:prstDash val="solid"/>
+                      <a:round/>
+                      <a:headEnd type="none" w="med" len="med"/>
+                      <a:tailEnd type="none" w="med" len="med"/>
+                    </a:lnT>
+                    <a:lnB w="12700" cap="flat" cmpd="sng" algn="ctr">
+                      <a:solidFill>
+                        <a:schemeClr val="tx1"/>
+                      </a:solidFill>
+                      <a:prstDash val="solid"/>
+                      <a:round/>
+                      <a:headEnd type="none" w="med" len="med"/>
+                      <a:tailEnd type="none" w="med" len="med"/>
+                    </a:lnB>
+                    <a:solidFill>
+                      <a:srgbClr val="C00000"/>
+                    </a:solidFill>
+                  </a:tcPr>
+                </a:tc>
+                <a:tc>
+                  <a:txBody>
+                    <a:bodyPr/>
+                    <a:lstStyle/>
+                    <a:p>
+                      <a:pPr marL="0" marR="0" lvl="0" indent="0" algn="ctr" defTabSz="914400" rtl="1" eaLnBrk="1" fontAlgn="auto" latinLnBrk="0" hangingPunct="1">
+                        <a:lnSpc>
+                          <a:spcPct val="100000"/>
+                        </a:lnSpc>
+                        <a:spcBef>
+                          <a:spcPts val="0"/>
+                        </a:spcBef>
+                        <a:spcAft>
+                          <a:spcPts val="0"/>
+                        </a:spcAft>
+                        <a:buClrTx/>
+                        <a:buSzTx/>
+                        <a:buFontTx/>
+                        <a:buNone/>
+                        <a:tabLst/>
+                        <a:defRPr/>
+                      </a:pPr>
+                      <a:r>
+                        <a:rPr lang="en-US" dirty="0"/>
+                        <a:t>Mask</a:t>
+                      </a:r>
+                      <a:endParaRPr lang="he-IL" dirty="0"/>
+                    </a:p>
+                  </a:txBody>
+                  <a:tcPr>
+                    <a:lnL w="12700" cap="flat" cmpd="sng" algn="ctr">
+                      <a:solidFill>
+                        <a:schemeClr val="tx1"/>
+                      </a:solidFill>
+                      <a:prstDash val="solid"/>
+                      <a:round/>
+                      <a:headEnd type="none" w="med" len="med"/>
+                      <a:tailEnd type="none" w="med" len="med"/>
+                    </a:lnL>
+                    <a:lnR w="12700" cap="flat" cmpd="sng" algn="ctr">
+                      <a:solidFill>
+                        <a:schemeClr val="tx1"/>
+                      </a:solidFill>
+                      <a:prstDash val="solid"/>
+                      <a:round/>
+                      <a:headEnd type="none" w="med" len="med"/>
+                      <a:tailEnd type="none" w="med" len="med"/>
+                    </a:lnR>
+                    <a:lnT w="12700" cap="flat" cmpd="sng" algn="ctr">
+                      <a:solidFill>
+                        <a:schemeClr val="tx1"/>
+                      </a:solidFill>
+                      <a:prstDash val="solid"/>
+                      <a:round/>
+                      <a:headEnd type="none" w="med" len="med"/>
+                      <a:tailEnd type="none" w="med" len="med"/>
+                    </a:lnT>
+                    <a:lnB w="12700" cap="flat" cmpd="sng" algn="ctr">
+                      <a:solidFill>
+                        <a:schemeClr val="tx1"/>
+                      </a:solidFill>
+                      <a:prstDash val="solid"/>
+                      <a:round/>
+                      <a:headEnd type="none" w="med" len="med"/>
+                      <a:tailEnd type="none" w="med" len="med"/>
+                    </a:lnB>
+                    <a:lnTlToBr w="12700" cmpd="sng">
+                      <a:noFill/>
+                      <a:prstDash val="solid"/>
+                    </a:lnTlToBr>
+                    <a:lnBlToTr w="12700" cmpd="sng">
+                      <a:noFill/>
+                      <a:prstDash val="solid"/>
+                    </a:lnBlToTr>
+                    <a:solidFill>
+                      <a:schemeClr val="accent2">
+                        <a:lumMod val="75000"/>
+                      </a:schemeClr>
+                    </a:solidFill>
+                  </a:tcPr>
+                </a:tc>
+                <a:tc>
+                  <a:txBody>
+                    <a:bodyPr/>
+                    <a:lstStyle/>
+                    <a:p>
+                      <a:pPr marL="0" marR="0" lvl="0" indent="0" algn="l" defTabSz="914400" rtl="1" eaLnBrk="1" fontAlgn="auto" latinLnBrk="0" hangingPunct="1">
+                        <a:lnSpc>
+                          <a:spcPct val="100000"/>
+                        </a:lnSpc>
+                        <a:spcBef>
+                          <a:spcPts val="0"/>
+                        </a:spcBef>
+                        <a:spcAft>
+                          <a:spcPts val="0"/>
+                        </a:spcAft>
+                        <a:buClrTx/>
+                        <a:buSzTx/>
+                        <a:buFontTx/>
+                        <a:buNone/>
+                        <a:tabLst/>
+                        <a:defRPr/>
+                      </a:pPr>
+                      <a:r>
+                        <a:rPr lang="en-US" dirty="0"/>
+                        <a:t>Device 5 Id</a:t>
+                      </a:r>
+                      <a:endParaRPr lang="he-IL" dirty="0"/>
+                    </a:p>
+                    <a:p>
+                      <a:pPr rtl="1"/>
+                      <a:endParaRPr lang="he-IL" dirty="0"/>
+                    </a:p>
+                  </a:txBody>
+                  <a:tcPr>
+                    <a:lnL w="12700" cap="flat" cmpd="sng" algn="ctr">
+                      <a:solidFill>
+                        <a:schemeClr val="tx1"/>
+                      </a:solidFill>
+                      <a:prstDash val="solid"/>
+                      <a:round/>
+                      <a:headEnd type="none" w="med" len="med"/>
+                      <a:tailEnd type="none" w="med" len="med"/>
+                    </a:lnL>
+                    <a:lnR w="12700" cap="flat" cmpd="sng" algn="ctr">
+                      <a:solidFill>
+                        <a:schemeClr val="tx1"/>
+                      </a:solidFill>
+                      <a:prstDash val="solid"/>
+                      <a:round/>
+                      <a:headEnd type="none" w="med" len="med"/>
+                      <a:tailEnd type="none" w="med" len="med"/>
+                    </a:lnR>
+                    <a:lnT w="12700" cap="flat" cmpd="sng" algn="ctr">
+                      <a:solidFill>
+                        <a:schemeClr val="tx1"/>
+                      </a:solidFill>
+                      <a:prstDash val="solid"/>
+                      <a:round/>
+                      <a:headEnd type="none" w="med" len="med"/>
+                      <a:tailEnd type="none" w="med" len="med"/>
+                    </a:lnT>
+                    <a:lnB w="12700" cap="flat" cmpd="sng" algn="ctr">
+                      <a:solidFill>
+                        <a:schemeClr val="tx1"/>
+                      </a:solidFill>
+                      <a:prstDash val="solid"/>
+                      <a:round/>
+                      <a:headEnd type="none" w="med" len="med"/>
+                      <a:tailEnd type="none" w="med" len="med"/>
+                    </a:lnB>
+                    <a:lnTlToBr w="12700" cmpd="sng">
+                      <a:noFill/>
+                      <a:prstDash val="solid"/>
+                    </a:lnTlToBr>
+                    <a:lnBlToTr w="12700" cmpd="sng">
+                      <a:noFill/>
+                      <a:prstDash val="solid"/>
+                    </a:lnBlToTr>
+                    <a:solidFill>
+                      <a:schemeClr val="accent2">
+                        <a:lumMod val="75000"/>
+                      </a:schemeClr>
+                    </a:solidFill>
+                  </a:tcPr>
+                </a:tc>
+                <a:tc>
+                  <a:txBody>
+                    <a:bodyPr/>
+                    <a:lstStyle/>
+                    <a:p>
+                      <a:pPr marL="0" marR="0" lvl="0" indent="0" algn="l" defTabSz="914400" rtl="1" eaLnBrk="1" fontAlgn="auto" latinLnBrk="0" hangingPunct="1">
+                        <a:lnSpc>
+                          <a:spcPct val="100000"/>
+                        </a:lnSpc>
+                        <a:spcBef>
+                          <a:spcPts val="0"/>
+                        </a:spcBef>
+                        <a:spcAft>
+                          <a:spcPts val="0"/>
+                        </a:spcAft>
+                        <a:buClrTx/>
+                        <a:buSzTx/>
+                        <a:buFontTx/>
+                        <a:buNone/>
+                        <a:tabLst/>
+                        <a:defRPr/>
+                      </a:pPr>
+                      <a:r>
+                        <a:rPr lang="en-US" dirty="0"/>
+                        <a:t>Device 4 Id</a:t>
+                      </a:r>
+                      <a:endParaRPr lang="he-IL" dirty="0"/>
+                    </a:p>
+                    <a:p>
+                      <a:pPr rtl="1"/>
+                      <a:endParaRPr lang="he-IL" dirty="0"/>
+                    </a:p>
+                  </a:txBody>
+                  <a:tcPr>
+                    <a:lnL w="12700" cap="flat" cmpd="sng" algn="ctr">
+                      <a:solidFill>
+                        <a:schemeClr val="tx1"/>
+                      </a:solidFill>
+                      <a:prstDash val="solid"/>
+                      <a:round/>
+                      <a:headEnd type="none" w="med" len="med"/>
+                      <a:tailEnd type="none" w="med" len="med"/>
+                    </a:lnL>
+                    <a:lnR w="12700" cap="flat" cmpd="sng" algn="ctr">
+                      <a:solidFill>
+                        <a:schemeClr val="tx1"/>
+                      </a:solidFill>
+                      <a:prstDash val="solid"/>
+                      <a:round/>
+                      <a:headEnd type="none" w="med" len="med"/>
+                      <a:tailEnd type="none" w="med" len="med"/>
+                    </a:lnR>
+                    <a:lnT w="12700" cap="flat" cmpd="sng" algn="ctr">
+                      <a:solidFill>
+                        <a:schemeClr val="tx1"/>
+                      </a:solidFill>
+                      <a:prstDash val="solid"/>
+                      <a:round/>
+                      <a:headEnd type="none" w="med" len="med"/>
+                      <a:tailEnd type="none" w="med" len="med"/>
+                    </a:lnT>
+                    <a:lnB w="12700" cap="flat" cmpd="sng" algn="ctr">
+                      <a:solidFill>
+                        <a:schemeClr val="tx1"/>
+                      </a:solidFill>
+                      <a:prstDash val="solid"/>
+                      <a:round/>
+                      <a:headEnd type="none" w="med" len="med"/>
+                      <a:tailEnd type="none" w="med" len="med"/>
+                    </a:lnB>
+                    <a:lnTlToBr w="12700" cmpd="sng">
+                      <a:noFill/>
+                      <a:prstDash val="solid"/>
+                    </a:lnTlToBr>
+                    <a:lnBlToTr w="12700" cmpd="sng">
+                      <a:noFill/>
+                      <a:prstDash val="solid"/>
+                    </a:lnBlToTr>
+                    <a:solidFill>
+                      <a:schemeClr val="accent2">
+                        <a:lumMod val="75000"/>
+                      </a:schemeClr>
+                    </a:solidFill>
+                  </a:tcPr>
+                </a:tc>
+                <a:tc>
+                  <a:txBody>
+                    <a:bodyPr/>
+                    <a:lstStyle/>
+                    <a:p>
+                      <a:pPr marL="0" marR="0" lvl="0" indent="0" algn="l" defTabSz="914400" rtl="1" eaLnBrk="1" fontAlgn="auto" latinLnBrk="0" hangingPunct="1">
+                        <a:lnSpc>
+                          <a:spcPct val="100000"/>
+                        </a:lnSpc>
+                        <a:spcBef>
+                          <a:spcPts val="0"/>
+                        </a:spcBef>
+                        <a:spcAft>
+                          <a:spcPts val="0"/>
+                        </a:spcAft>
+                        <a:buClrTx/>
+                        <a:buSzTx/>
+                        <a:buFontTx/>
+                        <a:buNone/>
+                        <a:tabLst/>
+                        <a:defRPr/>
+                      </a:pPr>
+                      <a:r>
+                        <a:rPr lang="en-US" dirty="0"/>
+                        <a:t>Device 3 Id</a:t>
+                      </a:r>
+                      <a:endParaRPr lang="he-IL" dirty="0"/>
+                    </a:p>
+                    <a:p>
+                      <a:pPr rtl="1"/>
+                      <a:endParaRPr lang="he-IL" dirty="0"/>
+                    </a:p>
+                  </a:txBody>
+                  <a:tcPr>
+                    <a:lnL w="12700" cap="flat" cmpd="sng" algn="ctr">
+                      <a:solidFill>
+                        <a:schemeClr val="tx1"/>
+                      </a:solidFill>
+                      <a:prstDash val="solid"/>
+                      <a:round/>
+                      <a:headEnd type="none" w="med" len="med"/>
+                      <a:tailEnd type="none" w="med" len="med"/>
+                    </a:lnL>
+                    <a:lnR w="12700" cap="flat" cmpd="sng" algn="ctr">
+                      <a:solidFill>
+                        <a:schemeClr val="tx1"/>
+                      </a:solidFill>
+                      <a:prstDash val="solid"/>
+                      <a:round/>
+                      <a:headEnd type="none" w="med" len="med"/>
+                      <a:tailEnd type="none" w="med" len="med"/>
+                    </a:lnR>
+                    <a:lnT w="12700" cap="flat" cmpd="sng" algn="ctr">
+                      <a:solidFill>
+                        <a:schemeClr val="tx1"/>
+                      </a:solidFill>
+                      <a:prstDash val="solid"/>
+                      <a:round/>
+                      <a:headEnd type="none" w="med" len="med"/>
+                      <a:tailEnd type="none" w="med" len="med"/>
+                    </a:lnT>
+                    <a:lnB w="12700" cap="flat" cmpd="sng" algn="ctr">
+                      <a:solidFill>
+                        <a:schemeClr val="tx1"/>
+                      </a:solidFill>
+                      <a:prstDash val="solid"/>
+                      <a:round/>
+                      <a:headEnd type="none" w="med" len="med"/>
+                      <a:tailEnd type="none" w="med" len="med"/>
+                    </a:lnB>
+                    <a:lnTlToBr w="12700" cmpd="sng">
+                      <a:noFill/>
+                      <a:prstDash val="solid"/>
+                    </a:lnTlToBr>
+                    <a:lnBlToTr w="12700" cmpd="sng">
+                      <a:noFill/>
+                      <a:prstDash val="solid"/>
+                    </a:lnBlToTr>
+                    <a:solidFill>
+                      <a:schemeClr val="accent2">
+                        <a:lumMod val="75000"/>
+                      </a:schemeClr>
+                    </a:solidFill>
+                  </a:tcPr>
+                </a:tc>
+                <a:tc>
+                  <a:txBody>
+                    <a:bodyPr/>
+                    <a:lstStyle/>
+                    <a:p>
+                      <a:pPr rtl="1"/>
+                      <a:r>
+                        <a:rPr lang="en-US" dirty="0"/>
+                        <a:t>Device 2 Id</a:t>
+                      </a:r>
+                      <a:endParaRPr lang="he-IL" dirty="0"/>
+                    </a:p>
+                  </a:txBody>
+                  <a:tcPr>
+                    <a:lnL w="12700" cap="flat" cmpd="sng" algn="ctr">
+                      <a:solidFill>
+                        <a:schemeClr val="tx1"/>
+                      </a:solidFill>
+                      <a:prstDash val="solid"/>
+                      <a:round/>
+                      <a:headEnd type="none" w="med" len="med"/>
+                      <a:tailEnd type="none" w="med" len="med"/>
+                    </a:lnL>
+                    <a:lnR w="12700" cap="flat" cmpd="sng" algn="ctr">
+                      <a:solidFill>
+                        <a:schemeClr val="tx1"/>
+                      </a:solidFill>
+                      <a:prstDash val="solid"/>
+                      <a:round/>
+                      <a:headEnd type="none" w="med" len="med"/>
+                      <a:tailEnd type="none" w="med" len="med"/>
+                    </a:lnR>
+                    <a:lnT w="12700" cap="flat" cmpd="sng" algn="ctr">
+                      <a:solidFill>
+                        <a:schemeClr val="tx1"/>
+                      </a:solidFill>
+                      <a:prstDash val="solid"/>
+                      <a:round/>
+                      <a:headEnd type="none" w="med" len="med"/>
+                      <a:tailEnd type="none" w="med" len="med"/>
+                    </a:lnT>
+                    <a:lnB w="12700" cap="flat" cmpd="sng" algn="ctr">
+                      <a:solidFill>
+                        <a:schemeClr val="tx1"/>
+                      </a:solidFill>
+                      <a:prstDash val="solid"/>
+                      <a:round/>
+                      <a:headEnd type="none" w="med" len="med"/>
+                      <a:tailEnd type="none" w="med" len="med"/>
+                    </a:lnB>
+                    <a:lnTlToBr w="12700" cmpd="sng">
+                      <a:noFill/>
+                      <a:prstDash val="solid"/>
+                    </a:lnTlToBr>
+                    <a:lnBlToTr w="12700" cmpd="sng">
+                      <a:noFill/>
+                      <a:prstDash val="solid"/>
+                    </a:lnBlToTr>
+                    <a:solidFill>
+                      <a:schemeClr val="accent2">
+                        <a:lumMod val="75000"/>
+                      </a:schemeClr>
+                    </a:solidFill>
+                  </a:tcPr>
+                </a:tc>
+                <a:tc>
+                  <a:txBody>
+                    <a:bodyPr/>
+                    <a:lstStyle/>
+                    <a:p>
+                      <a:pPr rtl="1"/>
+                      <a:r>
+                        <a:rPr lang="en-US" dirty="0"/>
+                        <a:t>Root ID</a:t>
+                      </a:r>
+                      <a:endParaRPr lang="he-IL" dirty="0"/>
+                    </a:p>
+                  </a:txBody>
+                  <a:tcPr>
+                    <a:lnL w="12700" cap="flat" cmpd="sng" algn="ctr">
+                      <a:solidFill>
+                        <a:schemeClr val="tx1"/>
+                      </a:solidFill>
+                      <a:prstDash val="solid"/>
+                      <a:round/>
+                      <a:headEnd type="none" w="med" len="med"/>
+                      <a:tailEnd type="none" w="med" len="med"/>
+                    </a:lnL>
+                    <a:lnR w="12700" cap="flat" cmpd="sng" algn="ctr">
+                      <a:solidFill>
+                        <a:schemeClr val="tx1"/>
+                      </a:solidFill>
+                      <a:prstDash val="solid"/>
+                      <a:round/>
+                      <a:headEnd type="none" w="med" len="med"/>
+                      <a:tailEnd type="none" w="med" len="med"/>
+                    </a:lnR>
+                    <a:lnT w="12700" cap="flat" cmpd="sng" algn="ctr">
+                      <a:solidFill>
+                        <a:schemeClr val="tx1"/>
+                      </a:solidFill>
+                      <a:prstDash val="solid"/>
+                      <a:round/>
+                      <a:headEnd type="none" w="med" len="med"/>
+                      <a:tailEnd type="none" w="med" len="med"/>
+                    </a:lnT>
+                    <a:lnB w="12700" cap="flat" cmpd="sng" algn="ctr">
+                      <a:solidFill>
+                        <a:schemeClr val="tx1"/>
+                      </a:solidFill>
+                      <a:prstDash val="solid"/>
+                      <a:round/>
+                      <a:headEnd type="none" w="med" len="med"/>
+                      <a:tailEnd type="none" w="med" len="med"/>
+                    </a:lnB>
+                    <a:lnTlToBr w="12700" cmpd="sng">
+                      <a:noFill/>
+                      <a:prstDash val="solid"/>
+                    </a:lnTlToBr>
+                    <a:lnBlToTr w="12700" cmpd="sng">
+                      <a:noFill/>
+                      <a:prstDash val="solid"/>
+                    </a:lnBlToTr>
+                    <a:solidFill>
+                      <a:schemeClr val="accent2">
+                        <a:lumMod val="75000"/>
+                      </a:schemeClr>
+                    </a:solidFill>
+                  </a:tcPr>
+                </a:tc>
+                <a:tc>
+                  <a:txBody>
+                    <a:bodyPr/>
+                    <a:lstStyle/>
+                    <a:p>
+                      <a:pPr algn="ctr" rtl="1"/>
+                      <a:r>
+                        <a:rPr lang="en-US" dirty="0"/>
+                        <a:t>TYPE</a:t>
+                      </a:r>
+                      <a:br>
+                        <a:rPr lang="en-US" dirty="0"/>
+                      </a:br>
+                      <a:r>
+                        <a:rPr lang="en-US" dirty="0"/>
+                        <a:t>4bits</a:t>
+                      </a:r>
+                      <a:endParaRPr lang="he-IL" dirty="0"/>
+                    </a:p>
+                  </a:txBody>
+                  <a:tcPr>
+                    <a:lnL w="12700" cap="flat" cmpd="sng" algn="ctr">
+                      <a:solidFill>
+                        <a:schemeClr val="tx1"/>
+                      </a:solidFill>
+                      <a:prstDash val="solid"/>
+                      <a:round/>
+                      <a:headEnd type="none" w="med" len="med"/>
+                      <a:tailEnd type="none" w="med" len="med"/>
+                    </a:lnL>
+                    <a:lnR w="12700" cap="flat" cmpd="sng" algn="ctr">
+                      <a:solidFill>
+                        <a:schemeClr val="tx1"/>
+                      </a:solidFill>
+                      <a:prstDash val="solid"/>
+                      <a:round/>
+                      <a:headEnd type="none" w="med" len="med"/>
+                      <a:tailEnd type="none" w="med" len="med"/>
+                    </a:lnR>
+                    <a:lnT w="12700" cap="flat" cmpd="sng" algn="ctr">
+                      <a:solidFill>
+                        <a:schemeClr val="tx1"/>
+                      </a:solidFill>
+                      <a:prstDash val="solid"/>
+                      <a:round/>
+                      <a:headEnd type="none" w="med" len="med"/>
+                      <a:tailEnd type="none" w="med" len="med"/>
+                    </a:lnT>
+                    <a:lnB w="12700" cap="flat" cmpd="sng" algn="ctr">
+                      <a:solidFill>
+                        <a:schemeClr val="tx1"/>
+                      </a:solidFill>
+                      <a:prstDash val="solid"/>
+                      <a:round/>
+                      <a:headEnd type="none" w="med" len="med"/>
+                      <a:tailEnd type="none" w="med" len="med"/>
+                    </a:lnB>
+                  </a:tcPr>
+                </a:tc>
+                <a:extLst>
+                  <a:ext uri="{0D108BD9-81ED-4DB2-BD59-A6C34878D82A}">
+                    <a16:rowId xmlns:a16="http://schemas.microsoft.com/office/drawing/2014/main" val="2126829040"/>
+                  </a:ext>
+                </a:extLst>
+              </a:tr>
+              <a:tr h="989305">
+                <a:tc>
+                  <a:txBody>
+                    <a:bodyPr/>
+                    <a:lstStyle/>
+                    <a:p>
+                      <a:pPr algn="ctr" rtl="1"/>
+                      <a:r>
+                        <a:rPr lang="en-US" dirty="0"/>
+                        <a:t>Value:</a:t>
+                      </a:r>
+                      <a:br>
+                        <a:rPr lang="en-US" dirty="0"/>
+                      </a:br>
+                      <a:r>
+                        <a:rPr lang="en-US" dirty="0"/>
+                        <a:t>CRC8</a:t>
+                      </a:r>
+                      <a:endParaRPr lang="he-IL" dirty="0"/>
+                    </a:p>
+                  </a:txBody>
+                  <a:tcPr>
+                    <a:lnL w="12700" cap="flat" cmpd="sng" algn="ctr">
+                      <a:solidFill>
+                        <a:schemeClr val="tx1"/>
+                      </a:solidFill>
+                      <a:prstDash val="solid"/>
+                      <a:round/>
+                      <a:headEnd type="none" w="med" len="med"/>
+                      <a:tailEnd type="none" w="med" len="med"/>
+                    </a:lnL>
+                    <a:lnR w="12700" cap="flat" cmpd="sng" algn="ctr">
+                      <a:solidFill>
+                        <a:schemeClr val="tx1"/>
+                      </a:solidFill>
+                      <a:prstDash val="solid"/>
+                      <a:round/>
+                      <a:headEnd type="none" w="med" len="med"/>
+                      <a:tailEnd type="none" w="med" len="med"/>
+                    </a:lnR>
+                    <a:lnT w="12700" cap="flat" cmpd="sng" algn="ctr">
+                      <a:solidFill>
+                        <a:schemeClr val="tx1"/>
+                      </a:solidFill>
+                      <a:prstDash val="solid"/>
+                      <a:round/>
+                      <a:headEnd type="none" w="med" len="med"/>
+                      <a:tailEnd type="none" w="med" len="med"/>
+                    </a:lnT>
+                    <a:lnB w="12700" cap="flat" cmpd="sng" algn="ctr">
+                      <a:solidFill>
+                        <a:schemeClr val="tx1"/>
+                      </a:solidFill>
+                      <a:prstDash val="solid"/>
+                      <a:round/>
+                      <a:headEnd type="none" w="med" len="med"/>
+                      <a:tailEnd type="none" w="med" len="med"/>
+                    </a:lnB>
+                    <a:solidFill>
+                      <a:srgbClr val="FF0000"/>
+                    </a:solidFill>
+                  </a:tcPr>
+                </a:tc>
+                <a:tc>
+                  <a:txBody>
+                    <a:bodyPr/>
+                    <a:lstStyle/>
+                    <a:p>
+                      <a:pPr algn="ctr" rtl="1"/>
+                      <a:r>
+                        <a:rPr lang="en-US" dirty="0"/>
+                        <a:t>Value:</a:t>
+                      </a:r>
+                      <a:br>
+                        <a:rPr lang="en-US" dirty="0"/>
+                      </a:br>
+                      <a:r>
+                        <a:rPr lang="en-US" dirty="0"/>
+                        <a:t>8bits</a:t>
+                      </a:r>
+                      <a:endParaRPr lang="he-IL" dirty="0"/>
+                    </a:p>
+                  </a:txBody>
+                  <a:tcPr>
+                    <a:lnL w="12700" cap="flat" cmpd="sng" algn="ctr">
+                      <a:solidFill>
+                        <a:schemeClr val="tx1"/>
+                      </a:solidFill>
+                      <a:prstDash val="solid"/>
+                      <a:round/>
+                      <a:headEnd type="none" w="med" len="med"/>
+                      <a:tailEnd type="none" w="med" len="med"/>
+                    </a:lnL>
+                    <a:lnR w="12700" cap="flat" cmpd="sng" algn="ctr">
+                      <a:solidFill>
+                        <a:schemeClr val="tx1"/>
+                      </a:solidFill>
+                      <a:prstDash val="solid"/>
+                      <a:round/>
+                      <a:headEnd type="none" w="med" len="med"/>
+                      <a:tailEnd type="none" w="med" len="med"/>
+                    </a:lnR>
+                    <a:lnT w="12700" cap="flat" cmpd="sng" algn="ctr">
+                      <a:solidFill>
+                        <a:schemeClr val="tx1"/>
+                      </a:solidFill>
+                      <a:prstDash val="solid"/>
+                      <a:round/>
+                      <a:headEnd type="none" w="med" len="med"/>
+                      <a:tailEnd type="none" w="med" len="med"/>
+                    </a:lnT>
+                    <a:lnB w="12700" cap="flat" cmpd="sng" algn="ctr">
+                      <a:solidFill>
+                        <a:schemeClr val="tx1"/>
+                      </a:solidFill>
+                      <a:prstDash val="solid"/>
+                      <a:round/>
+                      <a:headEnd type="none" w="med" len="med"/>
+                      <a:tailEnd type="none" w="med" len="med"/>
+                    </a:lnB>
+                    <a:lnTlToBr w="12700" cmpd="sng">
+                      <a:noFill/>
+                      <a:prstDash val="solid"/>
+                    </a:lnTlToBr>
+                    <a:lnBlToTr w="12700" cmpd="sng">
+                      <a:noFill/>
+                      <a:prstDash val="solid"/>
+                    </a:lnBlToTr>
+                    <a:solidFill>
+                      <a:schemeClr val="accent2">
+                        <a:lumMod val="60000"/>
+                        <a:lumOff val="40000"/>
+                      </a:schemeClr>
+                    </a:solidFill>
+                  </a:tcPr>
+                </a:tc>
+                <a:tc>
+                  <a:txBody>
+                    <a:bodyPr/>
+                    <a:lstStyle/>
+                    <a:p>
+                      <a:pPr algn="ctr" rtl="1"/>
+                      <a:r>
+                        <a:rPr lang="en-US" dirty="0"/>
+                        <a:t>Value:</a:t>
+                      </a:r>
+                      <a:br>
+                        <a:rPr lang="en-US" dirty="0"/>
+                      </a:br>
+                      <a:r>
+                        <a:rPr lang="en-US" dirty="0"/>
+                        <a:t>8bits</a:t>
+                      </a:r>
+                      <a:endParaRPr lang="he-IL" dirty="0"/>
+                    </a:p>
+                  </a:txBody>
+                  <a:tcPr>
+                    <a:lnL w="12700" cap="flat" cmpd="sng" algn="ctr">
+                      <a:solidFill>
+                        <a:schemeClr val="tx1"/>
+                      </a:solidFill>
+                      <a:prstDash val="solid"/>
+                      <a:round/>
+                      <a:headEnd type="none" w="med" len="med"/>
+                      <a:tailEnd type="none" w="med" len="med"/>
+                    </a:lnL>
+                    <a:lnR w="12700" cap="flat" cmpd="sng" algn="ctr">
+                      <a:solidFill>
+                        <a:schemeClr val="tx1"/>
+                      </a:solidFill>
+                      <a:prstDash val="solid"/>
+                      <a:round/>
+                      <a:headEnd type="none" w="med" len="med"/>
+                      <a:tailEnd type="none" w="med" len="med"/>
+                    </a:lnR>
+                    <a:lnT w="12700" cap="flat" cmpd="sng" algn="ctr">
+                      <a:solidFill>
+                        <a:schemeClr val="tx1"/>
+                      </a:solidFill>
+                      <a:prstDash val="solid"/>
+                      <a:round/>
+                      <a:headEnd type="none" w="med" len="med"/>
+                      <a:tailEnd type="none" w="med" len="med"/>
+                    </a:lnT>
+                    <a:lnB w="12700" cap="flat" cmpd="sng" algn="ctr">
+                      <a:solidFill>
+                        <a:schemeClr val="tx1"/>
+                      </a:solidFill>
+                      <a:prstDash val="solid"/>
+                      <a:round/>
+                      <a:headEnd type="none" w="med" len="med"/>
+                      <a:tailEnd type="none" w="med" len="med"/>
+                    </a:lnB>
+                    <a:lnTlToBr w="12700" cmpd="sng">
+                      <a:noFill/>
+                      <a:prstDash val="solid"/>
+                    </a:lnTlToBr>
+                    <a:lnBlToTr w="12700" cmpd="sng">
+                      <a:noFill/>
+                      <a:prstDash val="solid"/>
+                    </a:lnBlToTr>
+                    <a:solidFill>
+                      <a:schemeClr val="accent2">
+                        <a:lumMod val="60000"/>
+                        <a:lumOff val="40000"/>
+                      </a:schemeClr>
+                    </a:solidFill>
+                  </a:tcPr>
+                </a:tc>
+                <a:tc>
+                  <a:txBody>
+                    <a:bodyPr/>
+                    <a:lstStyle/>
+                    <a:p>
+                      <a:pPr algn="ctr" rtl="1"/>
+                      <a:r>
+                        <a:rPr lang="en-US" dirty="0"/>
+                        <a:t>Value:</a:t>
+                      </a:r>
+                      <a:br>
+                        <a:rPr lang="en-US" dirty="0"/>
+                      </a:br>
+                      <a:r>
+                        <a:rPr lang="en-US" dirty="0"/>
+                        <a:t>8bits</a:t>
+                      </a:r>
+                      <a:endParaRPr lang="he-IL" dirty="0"/>
+                    </a:p>
+                  </a:txBody>
+                  <a:tcPr>
+                    <a:lnL w="12700" cap="flat" cmpd="sng" algn="ctr">
+                      <a:solidFill>
+                        <a:schemeClr val="tx1"/>
+                      </a:solidFill>
+                      <a:prstDash val="solid"/>
+                      <a:round/>
+                      <a:headEnd type="none" w="med" len="med"/>
+                      <a:tailEnd type="none" w="med" len="med"/>
+                    </a:lnL>
+                    <a:lnR w="12700" cap="flat" cmpd="sng" algn="ctr">
+                      <a:solidFill>
+                        <a:schemeClr val="tx1"/>
+                      </a:solidFill>
+                      <a:prstDash val="solid"/>
+                      <a:round/>
+                      <a:headEnd type="none" w="med" len="med"/>
+                      <a:tailEnd type="none" w="med" len="med"/>
+                    </a:lnR>
+                    <a:lnT w="12700" cap="flat" cmpd="sng" algn="ctr">
+                      <a:solidFill>
+                        <a:schemeClr val="tx1"/>
+                      </a:solidFill>
+                      <a:prstDash val="solid"/>
+                      <a:round/>
+                      <a:headEnd type="none" w="med" len="med"/>
+                      <a:tailEnd type="none" w="med" len="med"/>
+                    </a:lnT>
+                    <a:lnB w="12700" cap="flat" cmpd="sng" algn="ctr">
+                      <a:solidFill>
+                        <a:schemeClr val="tx1"/>
+                      </a:solidFill>
+                      <a:prstDash val="solid"/>
+                      <a:round/>
+                      <a:headEnd type="none" w="med" len="med"/>
+                      <a:tailEnd type="none" w="med" len="med"/>
+                    </a:lnB>
+                    <a:lnTlToBr w="12700" cmpd="sng">
+                      <a:noFill/>
+                      <a:prstDash val="solid"/>
+                    </a:lnTlToBr>
+                    <a:lnBlToTr w="12700" cmpd="sng">
+                      <a:noFill/>
+                      <a:prstDash val="solid"/>
+                    </a:lnBlToTr>
+                    <a:solidFill>
+                      <a:schemeClr val="accent2">
+                        <a:lumMod val="60000"/>
+                        <a:lumOff val="40000"/>
+                      </a:schemeClr>
+                    </a:solidFill>
+                  </a:tcPr>
+                </a:tc>
+                <a:tc>
+                  <a:txBody>
+                    <a:bodyPr/>
+                    <a:lstStyle/>
+                    <a:p>
+                      <a:pPr algn="ctr" rtl="1"/>
+                      <a:r>
+                        <a:rPr lang="en-US" dirty="0"/>
+                        <a:t>Value:</a:t>
+                      </a:r>
+                      <a:br>
+                        <a:rPr lang="en-US" dirty="0"/>
+                      </a:br>
+                      <a:r>
+                        <a:rPr lang="en-US" dirty="0"/>
+                        <a:t>8bits</a:t>
+                      </a:r>
+                      <a:endParaRPr lang="he-IL" dirty="0"/>
+                    </a:p>
+                  </a:txBody>
+                  <a:tcPr>
+                    <a:lnL w="12700" cap="flat" cmpd="sng" algn="ctr">
+                      <a:solidFill>
+                        <a:schemeClr val="tx1"/>
+                      </a:solidFill>
+                      <a:prstDash val="solid"/>
+                      <a:round/>
+                      <a:headEnd type="none" w="med" len="med"/>
+                      <a:tailEnd type="none" w="med" len="med"/>
+                    </a:lnL>
+                    <a:lnR w="12700" cap="flat" cmpd="sng" algn="ctr">
+                      <a:solidFill>
+                        <a:schemeClr val="tx1"/>
+                      </a:solidFill>
+                      <a:prstDash val="solid"/>
+                      <a:round/>
+                      <a:headEnd type="none" w="med" len="med"/>
+                      <a:tailEnd type="none" w="med" len="med"/>
+                    </a:lnR>
+                    <a:lnT w="12700" cap="flat" cmpd="sng" algn="ctr">
+                      <a:solidFill>
+                        <a:schemeClr val="tx1"/>
+                      </a:solidFill>
+                      <a:prstDash val="solid"/>
+                      <a:round/>
+                      <a:headEnd type="none" w="med" len="med"/>
+                      <a:tailEnd type="none" w="med" len="med"/>
+                    </a:lnT>
+                    <a:lnB w="12700" cap="flat" cmpd="sng" algn="ctr">
+                      <a:solidFill>
+                        <a:schemeClr val="tx1"/>
+                      </a:solidFill>
+                      <a:prstDash val="solid"/>
+                      <a:round/>
+                      <a:headEnd type="none" w="med" len="med"/>
+                      <a:tailEnd type="none" w="med" len="med"/>
+                    </a:lnB>
+                    <a:lnTlToBr w="12700" cmpd="sng">
+                      <a:noFill/>
+                      <a:prstDash val="solid"/>
+                    </a:lnTlToBr>
+                    <a:lnBlToTr w="12700" cmpd="sng">
+                      <a:noFill/>
+                      <a:prstDash val="solid"/>
+                    </a:lnBlToTr>
+                    <a:solidFill>
+                      <a:schemeClr val="accent2">
+                        <a:lumMod val="60000"/>
+                        <a:lumOff val="40000"/>
+                      </a:schemeClr>
+                    </a:solidFill>
+                  </a:tcPr>
+                </a:tc>
+                <a:tc>
+                  <a:txBody>
+                    <a:bodyPr/>
+                    <a:lstStyle/>
+                    <a:p>
+                      <a:pPr algn="ctr" rtl="1"/>
+                      <a:r>
+                        <a:rPr lang="en-US" dirty="0"/>
+                        <a:t>Value:</a:t>
+                      </a:r>
+                      <a:br>
+                        <a:rPr lang="en-US" dirty="0"/>
+                      </a:br>
+                      <a:r>
+                        <a:rPr lang="en-US" dirty="0"/>
+                        <a:t>8bits</a:t>
+                      </a:r>
+                      <a:endParaRPr lang="he-IL" dirty="0"/>
+                    </a:p>
+                  </a:txBody>
+                  <a:tcPr>
+                    <a:lnL w="12700" cap="flat" cmpd="sng" algn="ctr">
+                      <a:solidFill>
+                        <a:schemeClr val="tx1"/>
+                      </a:solidFill>
+                      <a:prstDash val="solid"/>
+                      <a:round/>
+                      <a:headEnd type="none" w="med" len="med"/>
+                      <a:tailEnd type="none" w="med" len="med"/>
+                    </a:lnL>
+                    <a:lnR w="12700" cap="flat" cmpd="sng" algn="ctr">
+                      <a:solidFill>
+                        <a:schemeClr val="tx1"/>
+                      </a:solidFill>
+                      <a:prstDash val="solid"/>
+                      <a:round/>
+                      <a:headEnd type="none" w="med" len="med"/>
+                      <a:tailEnd type="none" w="med" len="med"/>
+                    </a:lnR>
+                    <a:lnT w="12700" cap="flat" cmpd="sng" algn="ctr">
+                      <a:solidFill>
+                        <a:schemeClr val="tx1"/>
+                      </a:solidFill>
+                      <a:prstDash val="solid"/>
+                      <a:round/>
+                      <a:headEnd type="none" w="med" len="med"/>
+                      <a:tailEnd type="none" w="med" len="med"/>
+                    </a:lnT>
+                    <a:lnB w="12700" cap="flat" cmpd="sng" algn="ctr">
+                      <a:solidFill>
+                        <a:schemeClr val="tx1"/>
+                      </a:solidFill>
+                      <a:prstDash val="solid"/>
+                      <a:round/>
+                      <a:headEnd type="none" w="med" len="med"/>
+                      <a:tailEnd type="none" w="med" len="med"/>
+                    </a:lnB>
+                    <a:lnTlToBr w="12700" cmpd="sng">
+                      <a:noFill/>
+                      <a:prstDash val="solid"/>
+                    </a:lnTlToBr>
+                    <a:lnBlToTr w="12700" cmpd="sng">
+                      <a:noFill/>
+                      <a:prstDash val="solid"/>
+                    </a:lnBlToTr>
+                    <a:solidFill>
+                      <a:schemeClr val="accent2">
+                        <a:lumMod val="60000"/>
+                        <a:lumOff val="40000"/>
+                      </a:schemeClr>
+                    </a:solidFill>
+                  </a:tcPr>
+                </a:tc>
+                <a:tc>
+                  <a:txBody>
+                    <a:bodyPr/>
+                    <a:lstStyle/>
+                    <a:p>
+                      <a:pPr algn="ctr" rtl="1"/>
+                      <a:r>
+                        <a:rPr lang="en-US" dirty="0"/>
+                        <a:t>Value:</a:t>
+                      </a:r>
+                      <a:br>
+                        <a:rPr lang="en-US" dirty="0"/>
+                      </a:br>
+                      <a:r>
+                        <a:rPr lang="en-US" dirty="0"/>
+                        <a:t>8bits</a:t>
+                      </a:r>
+                      <a:endParaRPr lang="he-IL" dirty="0"/>
+                    </a:p>
+                  </a:txBody>
+                  <a:tcPr>
+                    <a:lnL w="12700" cap="flat" cmpd="sng" algn="ctr">
+                      <a:solidFill>
+                        <a:schemeClr val="tx1"/>
+                      </a:solidFill>
+                      <a:prstDash val="solid"/>
+                      <a:round/>
+                      <a:headEnd type="none" w="med" len="med"/>
+                      <a:tailEnd type="none" w="med" len="med"/>
+                    </a:lnL>
+                    <a:lnR w="12700" cap="flat" cmpd="sng" algn="ctr">
+                      <a:solidFill>
+                        <a:schemeClr val="tx1"/>
+                      </a:solidFill>
+                      <a:prstDash val="solid"/>
+                      <a:round/>
+                      <a:headEnd type="none" w="med" len="med"/>
+                      <a:tailEnd type="none" w="med" len="med"/>
+                    </a:lnR>
+                    <a:lnT w="12700" cap="flat" cmpd="sng" algn="ctr">
+                      <a:solidFill>
+                        <a:schemeClr val="tx1"/>
+                      </a:solidFill>
+                      <a:prstDash val="solid"/>
+                      <a:round/>
+                      <a:headEnd type="none" w="med" len="med"/>
+                      <a:tailEnd type="none" w="med" len="med"/>
+                    </a:lnT>
+                    <a:lnB w="12700" cap="flat" cmpd="sng" algn="ctr">
+                      <a:solidFill>
+                        <a:schemeClr val="tx1"/>
+                      </a:solidFill>
+                      <a:prstDash val="solid"/>
+                      <a:round/>
+                      <a:headEnd type="none" w="med" len="med"/>
+                      <a:tailEnd type="none" w="med" len="med"/>
+                    </a:lnB>
+                    <a:lnTlToBr w="12700" cmpd="sng">
+                      <a:noFill/>
+                      <a:prstDash val="solid"/>
+                    </a:lnTlToBr>
+                    <a:lnBlToTr w="12700" cmpd="sng">
+                      <a:noFill/>
+                      <a:prstDash val="solid"/>
+                    </a:lnBlToTr>
+                    <a:solidFill>
+                      <a:schemeClr val="accent2">
+                        <a:lumMod val="60000"/>
+                        <a:lumOff val="40000"/>
+                      </a:schemeClr>
+                    </a:solidFill>
+                  </a:tcPr>
+                </a:tc>
+                <a:tc>
+                  <a:txBody>
+                    <a:bodyPr/>
+                    <a:lstStyle/>
+                    <a:p>
+                      <a:pPr algn="ctr" rtl="1"/>
+                      <a:r>
+                        <a:rPr lang="en-US" dirty="0"/>
+                        <a:t>Value:</a:t>
+                      </a:r>
+                      <a:br>
+                        <a:rPr lang="en-US" dirty="0"/>
+                      </a:br>
+                      <a:r>
+                        <a:rPr lang="en-US" dirty="0"/>
+                        <a:t>0x0F</a:t>
+                      </a:r>
+                      <a:endParaRPr lang="he-IL" dirty="0"/>
+                    </a:p>
+                  </a:txBody>
+                  <a:tcPr>
+                    <a:lnL w="12700" cap="flat" cmpd="sng" algn="ctr">
+                      <a:solidFill>
+                        <a:schemeClr val="tx1"/>
+                      </a:solidFill>
+                      <a:prstDash val="solid"/>
+                      <a:round/>
+                      <a:headEnd type="none" w="med" len="med"/>
+                      <a:tailEnd type="none" w="med" len="med"/>
+                    </a:lnL>
+                    <a:lnR w="12700" cap="flat" cmpd="sng" algn="ctr">
+                      <a:solidFill>
+                        <a:schemeClr val="tx1"/>
+                      </a:solidFill>
+                      <a:prstDash val="solid"/>
+                      <a:round/>
+                      <a:headEnd type="none" w="med" len="med"/>
+                      <a:tailEnd type="none" w="med" len="med"/>
+                    </a:lnR>
+                    <a:lnT w="12700" cap="flat" cmpd="sng" algn="ctr">
+                      <a:solidFill>
+                        <a:schemeClr val="tx1"/>
+                      </a:solidFill>
+                      <a:prstDash val="solid"/>
+                      <a:round/>
+                      <a:headEnd type="none" w="med" len="med"/>
+                      <a:tailEnd type="none" w="med" len="med"/>
+                    </a:lnT>
+                    <a:lnB w="12700" cap="flat" cmpd="sng" algn="ctr">
+                      <a:solidFill>
+                        <a:schemeClr val="tx1"/>
+                      </a:solidFill>
+                      <a:prstDash val="solid"/>
+                      <a:round/>
+                      <a:headEnd type="none" w="med" len="med"/>
+                      <a:tailEnd type="none" w="med" len="med"/>
+                    </a:lnB>
+                    <a:solidFill>
+                      <a:srgbClr val="00B0F0"/>
+                    </a:solidFill>
+                  </a:tcPr>
+                </a:tc>
+                <a:extLst>
+                  <a:ext uri="{0D108BD9-81ED-4DB2-BD59-A6C34878D82A}">
+                    <a16:rowId xmlns:a16="http://schemas.microsoft.com/office/drawing/2014/main" val="3329294810"/>
+                  </a:ext>
+                </a:extLst>
+              </a:tr>
+            </a:tbl>
+          </a:graphicData>
+        </a:graphic>
+      </p:graphicFrame>
+      <p:sp>
+        <p:nvSpPr>
+          <p:cNvPr id="8" name="TextBox 7">
+            <a:extLst>
+              <a:ext uri="{FF2B5EF4-FFF2-40B4-BE49-F238E27FC236}">
+                <a16:creationId xmlns:a16="http://schemas.microsoft.com/office/drawing/2014/main" id="{82799930-C7CB-DE2B-8637-BA990E5C16E0}"/>
+              </a:ext>
+            </a:extLst>
+          </p:cNvPr>
+          <p:cNvSpPr txBox="1"/>
+          <p:nvPr/>
+        </p:nvSpPr>
+        <p:spPr>
+          <a:xfrm>
+            <a:off x="1825160" y="2173081"/>
+            <a:ext cx="8047096" cy="369332"/>
+          </a:xfrm>
+          <a:prstGeom prst="rect">
+            <a:avLst/>
+          </a:prstGeom>
+          <a:noFill/>
+        </p:spPr>
+        <p:txBody>
+          <a:bodyPr wrap="square" rtlCol="1">
+            <a:spAutoFit/>
+          </a:bodyPr>
+          <a:lstStyle/>
+          <a:p>
+            <a:pPr algn="ctr"/>
+            <a:r>
+              <a:rPr lang="en-US" b="1" dirty="0"/>
+              <a:t>Network Convergence and Consumption Mask Distribution Structure</a:t>
+            </a:r>
+            <a:endParaRPr lang="he-IL" b="1" dirty="0"/>
+          </a:p>
+        </p:txBody>
+      </p:sp>
+    </p:spTree>
+    <p:extLst>
+      <p:ext uri="{BB962C8B-B14F-4D97-AF65-F5344CB8AC3E}">
+        <p14:creationId xmlns:p14="http://schemas.microsoft.com/office/powerpoint/2010/main" val="309666981"/>
+      </p:ext>
+    </p:extLst>
+  </p:cSld>
+  <p:clrMapOvr>
+    <a:masterClrMapping/>
+  </p:clrMapOvr>
+</p:sld>
+</file>
+
 <file path=ppt/theme/theme1.xml><?xml version="1.0" encoding="utf-8"?>
 <a:theme xmlns:a="http://schemas.openxmlformats.org/drawingml/2006/main" name="Office Theme">
   <a:themeElements>
